--- a/ppt/FORGE_AI_Deck.pptx
+++ b/ppt/FORGE_AI_Deck.pptx
@@ -4,6 +4,9 @@
   <p:sldMasterIdLst>
     <p:sldMasterId id="2147483648" r:id="rId1"/>
   </p:sldMasterIdLst>
+  <p:notesMasterIdLst>
+    <p:notesMasterId r:id="rId12"/>
+  </p:notesMasterIdLst>
   <p:sldIdLst>
     <p:sldId id="256" r:id="rId2"/>
     <p:sldId id="257" r:id="rId3"/>
@@ -16,10 +19,7 @@
     <p:sldId id="264" r:id="rId10"/>
     <p:sldId id="265" r:id="rId11"/>
   </p:sldIdLst>
-  <p:notesMasterIdLst>
-    <p:notesMasterId r:id="rId12"/>
-  </p:notesMasterIdLst>
-  <p:sldSz cx="9144000" cy="5143500"/>
+  <p:sldSz cx="9144000" cy="5143500" type="screen16x9"/>
   <p:notesSz cx="5143500" cy="9144000"/>
   <p:defaultTextStyle>
     <a:lvl1pPr marL="0" algn="l" defTabSz="914400" rtl="0" eaLnBrk="1" latinLnBrk="0" hangingPunct="1">
@@ -113,6 +113,11 @@
       </a:defRPr>
     </a:lvl9pPr>
   </p:defaultTextStyle>
+  <p:extLst>
+    <p:ext uri="{EFAFB233-063F-42B5-8137-9DF3F51BA10A}">
+      <p15:sldGuideLst xmlns:p15="http://schemas.microsoft.com/office/powerpoint/2012/main"/>
+    </p:ext>
+  </p:extLst>
 </p:presentation>
 </file>
 
@@ -138,234 +143,10 @@
           <a:chExt cx="0" cy="0"/>
         </a:xfrm>
       </p:grpSpPr>
-      <p:sp>
-        <p:nvSpPr>
-          <p:cNvPr id="2" name="Header Placeholder 1"/>
-          <p:cNvSpPr>
-            <a:spLocks noGrp="1"/>
-          </p:cNvSpPr>
-          <p:nvPr>
-            <p:ph type="hdr" sz="quarter"/>
-          </p:nvPr>
-        </p:nvSpPr>
-        <p:spPr>
-          <a:xfrm>
-            <a:off x="0" y="0"/>
-            <a:ext cx="2971800" cy="458788"/>
-          </a:xfrm>
-          <a:prstGeom prst="rect">
-            <a:avLst/>
-          </a:prstGeom>
-        </p:spPr>
-        <p:txBody>
-          <a:bodyPr vert="horz" lIns="91440" tIns="45720" rIns="91440" bIns="45720" rtlCol="0"/>
-          <a:lstStyle>
-            <a:lvl1pPr algn="l">
-              <a:defRPr sz="1200"/>
-            </a:lvl1pPr>
-          </a:lstStyle>
-          <a:p>
-            <a:endParaRPr lang="en-US"/>
-          </a:p>
-        </p:txBody>
-      </p:sp>
-      <p:sp>
-        <p:nvSpPr>
-          <p:cNvPr id="3" name="Date Placeholder 2"/>
-          <p:cNvSpPr>
-            <a:spLocks noGrp="1"/>
-          </p:cNvSpPr>
-          <p:nvPr>
-            <p:ph type="dt" idx="1"/>
-          </p:nvPr>
-        </p:nvSpPr>
-        <p:spPr>
-          <a:xfrm>
-            <a:off x="3884613" y="0"/>
-            <a:ext cx="2971800" cy="458788"/>
-          </a:xfrm>
-          <a:prstGeom prst="rect">
-            <a:avLst/>
-          </a:prstGeom>
-        </p:spPr>
-        <p:txBody>
-          <a:bodyPr vert="horz" lIns="91440" tIns="45720" rIns="91440" bIns="45720" rtlCol="0"/>
-          <a:lstStyle>
-            <a:lvl1pPr algn="r">
-              <a:defRPr sz="1200"/>
-            </a:lvl1pPr>
-          </a:lstStyle>
-          <a:p>
-            <a:fld id="{5282F153-3F37-0F45-9E97-73ACFA13230C}" type="datetimeFigureOut">
-              <a:rPr lang="en-US"/>
-              <a:t>7/23/19</a:t>
-            </a:fld>
-            <a:endParaRPr lang="en-US"/>
-          </a:p>
-        </p:txBody>
-      </p:sp>
-      <p:sp>
-        <p:nvSpPr>
-          <p:cNvPr id="4" name="Slide Image Placeholder 3"/>
-          <p:cNvSpPr>
-            <a:spLocks noGrp="1" noRot="1" noChangeAspect="1"/>
-          </p:cNvSpPr>
-          <p:nvPr>
-            <p:ph type="sldImg" idx="2"/>
-          </p:nvPr>
-        </p:nvSpPr>
-        <p:spPr>
-          <a:xfrm>
-            <a:off x="685800" y="1143000"/>
-            <a:ext cx="5486400" cy="3086100"/>
-          </a:xfrm>
-          <a:prstGeom prst="rect">
-            <a:avLst/>
-          </a:prstGeom>
-          <a:noFill/>
-          <a:ln w="12700">
-            <a:solidFill>
-              <a:prstClr val="black"/>
-            </a:solidFill>
-          </a:ln>
-        </p:spPr>
-        <p:txBody>
-          <a:bodyPr vert="horz" lIns="91440" tIns="45720" rIns="91440" bIns="45720" rtlCol="0" anchor="ctr"/>
-          <a:lstStyle/>
-          <a:p>
-            <a:endParaRPr lang="en-US"/>
-          </a:p>
-        </p:txBody>
-      </p:sp>
-      <p:sp>
-        <p:nvSpPr>
-          <p:cNvPr id="5" name="Notes Placeholder 4"/>
-          <p:cNvSpPr>
-            <a:spLocks noGrp="1"/>
-          </p:cNvSpPr>
-          <p:nvPr>
-            <p:ph type="body" sz="quarter" idx="3"/>
-          </p:nvPr>
-        </p:nvSpPr>
-        <p:spPr>
-          <a:xfrm>
-            <a:off x="685800" y="4400550"/>
-            <a:ext cx="5486400" cy="3600450"/>
-          </a:xfrm>
-          <a:prstGeom prst="rect">
-            <a:avLst/>
-          </a:prstGeom>
-        </p:spPr>
-        <p:txBody>
-          <a:bodyPr vert="horz" lIns="91440" tIns="45720" rIns="91440" bIns="45720" rtlCol="0"/>
-          <a:lstStyle/>
-          <a:p>
-            <a:pPr lvl="0"/>
-            <a:r>
-              <a:rPr lang="en-US"/>
-              <a:t>Click to edit Master text styles</a:t>
-            </a:r>
-          </a:p>
-          <a:p>
-            <a:pPr lvl="1"/>
-            <a:r>
-              <a:rPr lang="en-US"/>
-              <a:t>Second level</a:t>
-            </a:r>
-          </a:p>
-          <a:p>
-            <a:pPr lvl="2"/>
-            <a:r>
-              <a:rPr lang="en-US"/>
-              <a:t>Third level</a:t>
-            </a:r>
-          </a:p>
-          <a:p>
-            <a:pPr lvl="3"/>
-            <a:r>
-              <a:rPr lang="en-US"/>
-              <a:t>Fourth level</a:t>
-            </a:r>
-          </a:p>
-          <a:p>
-            <a:pPr lvl="4"/>
-            <a:r>
-              <a:rPr lang="en-US"/>
-              <a:t>Fifth level</a:t>
-            </a:r>
-          </a:p>
-        </p:txBody>
-      </p:sp>
-      <p:sp>
-        <p:nvSpPr>
-          <p:cNvPr id="6" name="Footer Placeholder 5"/>
-          <p:cNvSpPr>
-            <a:spLocks noGrp="1"/>
-          </p:cNvSpPr>
-          <p:nvPr>
-            <p:ph type="ftr" sz="quarter" idx="4"/>
-          </p:nvPr>
-        </p:nvSpPr>
-        <p:spPr>
-          <a:xfrm>
-            <a:off x="0" y="8685213"/>
-            <a:ext cx="2971800" cy="458787"/>
-          </a:xfrm>
-          <a:prstGeom prst="rect">
-            <a:avLst/>
-          </a:prstGeom>
-        </p:spPr>
-        <p:txBody>
-          <a:bodyPr vert="horz" lIns="91440" tIns="45720" rIns="91440" bIns="45720" rtlCol="0" anchor="b"/>
-          <a:lstStyle>
-            <a:lvl1pPr algn="l">
-              <a:defRPr sz="1200"/>
-            </a:lvl1pPr>
-          </a:lstStyle>
-          <a:p>
-            <a:endParaRPr lang="en-US"/>
-          </a:p>
-        </p:txBody>
-      </p:sp>
-      <p:sp>
-        <p:nvSpPr>
-          <p:cNvPr id="7" name="Slide Number Placeholder 6"/>
-          <p:cNvSpPr>
-            <a:spLocks noGrp="1"/>
-          </p:cNvSpPr>
-          <p:nvPr>
-            <p:ph type="sldNum" sz="quarter" idx="5"/>
-          </p:nvPr>
-        </p:nvSpPr>
-        <p:spPr>
-          <a:xfrm>
-            <a:off x="3884613" y="8685213"/>
-            <a:ext cx="2971800" cy="458787"/>
-          </a:xfrm>
-          <a:prstGeom prst="rect">
-            <a:avLst/>
-          </a:prstGeom>
-        </p:spPr>
-        <p:txBody>
-          <a:bodyPr vert="horz" lIns="91440" tIns="45720" rIns="91440" bIns="45720" rtlCol="0" anchor="b"/>
-          <a:lstStyle>
-            <a:lvl1pPr algn="r">
-              <a:defRPr sz="1200"/>
-            </a:lvl1pPr>
-          </a:lstStyle>
-          <a:p>
-            <a:fld id="{CE5E9CC1-C706-0F49-92D6-E571CC5EEA8F}" type="slidenum">
-              <a:rPr lang="en-US"/>
-              <a:t>‹#›</a:t>
-            </a:fld>
-            <a:endParaRPr lang="en-US"/>
-          </a:p>
-        </p:txBody>
-      </p:sp>
     </p:spTree>
     <p:extLst>
       <p:ext uri="{BB962C8B-B14F-4D97-AF65-F5344CB8AC3E}">
-        <p14:creationId xmlns:p14="http://schemas.microsoft.com/office/powerpoint/2010/main" val="1024086991"/>
+        <p14:creationId xmlns:p14="http://schemas.microsoft.com/office/powerpoint/2010/main" val="2309996605"/>
       </p:ext>
     </p:extLst>
   </p:cSld>
@@ -509,10 +290,6 @@
           <a:bodyPr/>
           <a:lstStyle/>
           <a:p>
-            <a:r>
-              <a:rPr lang="en-US" dirty="0"/>
-              <a:t/>
-            </a:r>
             <a:endParaRPr lang="en-US" dirty="0"/>
           </a:p>
         </p:txBody>
@@ -597,10 +374,6 @@
           <a:bodyPr/>
           <a:lstStyle/>
           <a:p>
-            <a:r>
-              <a:rPr lang="en-US" dirty="0"/>
-              <a:t/>
-            </a:r>
             <a:endParaRPr lang="en-US" dirty="0"/>
           </a:p>
         </p:txBody>
@@ -685,10 +458,6 @@
           <a:bodyPr/>
           <a:lstStyle/>
           <a:p>
-            <a:r>
-              <a:rPr lang="en-US" dirty="0"/>
-              <a:t/>
-            </a:r>
             <a:endParaRPr lang="en-US" dirty="0"/>
           </a:p>
         </p:txBody>
@@ -773,10 +542,6 @@
           <a:bodyPr/>
           <a:lstStyle/>
           <a:p>
-            <a:r>
-              <a:rPr lang="en-US" dirty="0"/>
-              <a:t/>
-            </a:r>
             <a:endParaRPr lang="en-US" dirty="0"/>
           </a:p>
         </p:txBody>
@@ -861,10 +626,6 @@
           <a:bodyPr/>
           <a:lstStyle/>
           <a:p>
-            <a:r>
-              <a:rPr lang="en-US" dirty="0"/>
-              <a:t/>
-            </a:r>
             <a:endParaRPr lang="en-US" dirty="0"/>
           </a:p>
         </p:txBody>
@@ -949,10 +710,6 @@
           <a:bodyPr/>
           <a:lstStyle/>
           <a:p>
-            <a:r>
-              <a:rPr lang="en-US" dirty="0"/>
-              <a:t/>
-            </a:r>
             <a:endParaRPr lang="en-US" dirty="0"/>
           </a:p>
         </p:txBody>
@@ -1037,10 +794,6 @@
           <a:bodyPr/>
           <a:lstStyle/>
           <a:p>
-            <a:r>
-              <a:rPr lang="en-US" dirty="0"/>
-              <a:t/>
-            </a:r>
             <a:endParaRPr lang="en-US" dirty="0"/>
           </a:p>
         </p:txBody>
@@ -1125,10 +878,6 @@
           <a:bodyPr/>
           <a:lstStyle/>
           <a:p>
-            <a:r>
-              <a:rPr lang="en-US" dirty="0"/>
-              <a:t/>
-            </a:r>
             <a:endParaRPr lang="en-US" dirty="0"/>
           </a:p>
         </p:txBody>
@@ -1213,10 +962,6 @@
           <a:bodyPr/>
           <a:lstStyle/>
           <a:p>
-            <a:r>
-              <a:rPr lang="en-US" dirty="0"/>
-              <a:t/>
-            </a:r>
             <a:endParaRPr lang="en-US" dirty="0"/>
           </a:p>
         </p:txBody>
@@ -1301,10 +1046,6 @@
           <a:bodyPr/>
           <a:lstStyle/>
           <a:p>
-            <a:r>
-              <a:rPr lang="en-US" dirty="0"/>
-              <a:t/>
-            </a:r>
             <a:endParaRPr lang="en-US" dirty="0"/>
           </a:p>
         </p:txBody>
@@ -1378,6 +1119,11 @@
 <file path=ppt/slideMasters/slideMaster1.xml><?xml version="1.0" encoding="utf-8"?>
 <p:sldMaster xmlns:a="http://schemas.openxmlformats.org/drawingml/2006/main" xmlns:r="http://schemas.openxmlformats.org/officeDocument/2006/relationships" xmlns:p="http://schemas.openxmlformats.org/presentationml/2006/main">
   <p:cSld>
+    <p:bg>
+      <p:bgRef idx="1001">
+        <a:schemeClr val="bg1"/>
+      </p:bgRef>
+    </p:bg>
     <p:spTree>
       <p:nvGrpSpPr>
         <p:cNvPr id="1" name=""/>
@@ -1660,6 +1406,7 @@
         <a:solidFill>
           <a:srgbClr val="060E18"/>
         </a:solidFill>
+        <a:effectLst/>
       </p:bgPr>
     </p:bg>
     <p:spTree>
@@ -1695,6 +1442,13 @@
           </a:solidFill>
           <a:ln/>
         </p:spPr>
+        <p:txBody>
+          <a:bodyPr/>
+          <a:lstStyle/>
+          <a:p>
+            <a:endParaRPr lang="zh-CN" altLang="en-US"/>
+          </a:p>
+        </p:txBody>
       </p:sp>
       <p:sp>
         <p:nvSpPr>
@@ -1715,6 +1469,13 @@
           </a:solidFill>
           <a:ln/>
         </p:spPr>
+        <p:txBody>
+          <a:bodyPr/>
+          <a:lstStyle/>
+          <a:p>
+            <a:endParaRPr lang="zh-CN" altLang="en-US"/>
+          </a:p>
+        </p:txBody>
       </p:sp>
       <p:sp>
         <p:nvSpPr>
@@ -1735,66 +1496,11 @@
           </a:solidFill>
           <a:ln/>
         </p:spPr>
-      </p:sp>
-      <p:sp>
-        <p:nvSpPr>
-          <p:cNvPr id="5" name="Text 3"/>
-          <p:cNvSpPr/>
-          <p:nvPr/>
-        </p:nvSpPr>
-        <p:spPr>
-          <a:xfrm>
-            <a:off x="731520" y="548640"/>
-            <a:ext cx="7498080" cy="1371600"/>
-          </a:xfrm>
-          <a:prstGeom prst="rect">
-            <a:avLst/>
-          </a:prstGeom>
-          <a:noFill/>
-          <a:ln/>
-        </p:spPr>
-        <p:txBody>
-          <a:bodyPr wrap="square" lIns="0" tIns="0" rIns="0" bIns="0" rtlCol="0" anchor="ctr"/>
-          <a:lstStyle/>
-          <a:p>
-            <a:pPr indent="0" marL="0">
-              <a:lnSpc>
-                <a:spcPct val="110000"/>
-              </a:lnSpc>
-              <a:buNone/>
-            </a:pPr>
-            <a:r>
-              <a:rPr lang="en-US" sz="3800" b="1" dirty="0">
-                <a:solidFill>
-                  <a:srgbClr val="EBE8E3"/>
-                </a:solidFill>
-                <a:latin typeface="Georgia" pitchFamily="34" charset="0"/>
-                <a:ea typeface="Georgia" pitchFamily="34" charset="-122"/>
-                <a:cs typeface="Georgia" pitchFamily="34" charset="-120"/>
-              </a:rPr>
-              <a:t>THIS IS NOT</a:t>
-            </a:r>
-            <a:endParaRPr lang="en-US" sz="3800" dirty="0"/>
-          </a:p>
-          <a:p>
-            <a:pPr indent="0" marL="0">
-              <a:lnSpc>
-                <a:spcPct val="110000"/>
-              </a:lnSpc>
-              <a:buNone/>
-            </a:pPr>
-            <a:r>
-              <a:rPr lang="en-US" sz="3800" b="1" dirty="0">
-                <a:solidFill>
-                  <a:srgbClr val="EBE8E3"/>
-                </a:solidFill>
-                <a:latin typeface="Georgia" pitchFamily="34" charset="0"/>
-                <a:ea typeface="Georgia" pitchFamily="34" charset="-122"/>
-                <a:cs typeface="Georgia" pitchFamily="34" charset="-120"/>
-              </a:rPr>
-              <a:t>A LITERATURE TOOL.</a:t>
-            </a:r>
-            <a:endParaRPr lang="en-US" sz="3800" dirty="0"/>
+        <p:txBody>
+          <a:bodyPr/>
+          <a:lstStyle/>
+          <a:p>
+            <a:endParaRPr lang="zh-CN" altLang="en-US"/>
           </a:p>
         </p:txBody>
       </p:sp>
@@ -1806,8 +1512,8 @@
         </p:nvSpPr>
         <p:spPr>
           <a:xfrm>
-            <a:off x="731520" y="2011680"/>
-            <a:ext cx="2743200" cy="0"/>
+            <a:off x="793193" y="1937619"/>
+            <a:ext cx="4388407" cy="0"/>
           </a:xfrm>
           <a:prstGeom prst="line">
             <a:avLst/>
@@ -1820,6 +1526,13 @@
             <a:prstDash val="solid"/>
           </a:ln>
         </p:spPr>
+        <p:txBody>
+          <a:bodyPr/>
+          <a:lstStyle/>
+          <a:p>
+            <a:endParaRPr lang="zh-CN" altLang="en-US" dirty="0"/>
+          </a:p>
+        </p:txBody>
       </p:sp>
       <p:sp>
         <p:nvSpPr>
@@ -1829,7 +1542,7 @@
         </p:nvSpPr>
         <p:spPr>
           <a:xfrm>
-            <a:off x="731520" y="2240280"/>
+            <a:off x="731520" y="1042675"/>
             <a:ext cx="6400800" cy="777240"/>
           </a:xfrm>
           <a:prstGeom prst="rect">
@@ -1842,11 +1555,11 @@
           <a:bodyPr wrap="square" lIns="0" tIns="0" rIns="0" bIns="0" rtlCol="0" anchor="ctr"/>
           <a:lstStyle/>
           <a:p>
-            <a:pPr indent="0" marL="0">
-              <a:buNone/>
-            </a:pPr>
-            <a:r>
-              <a:rPr lang="en-US" sz="5200" b="1" spc="1000" kern="0" dirty="0">
+            <a:pPr marL="0" indent="0">
+              <a:buNone/>
+            </a:pPr>
+            <a:r>
+              <a:rPr lang="en-US" sz="5200" b="1" kern="0" spc="1000" dirty="0">
                 <a:solidFill>
                   <a:srgbClr val="00BFA5"/>
                 </a:solidFill>
@@ -1868,7 +1581,7 @@
         </p:nvSpPr>
         <p:spPr>
           <a:xfrm>
-            <a:off x="731520" y="3154680"/>
+            <a:off x="731520" y="1957075"/>
             <a:ext cx="7315200" cy="320040"/>
           </a:xfrm>
           <a:prstGeom prst="rect">
@@ -1881,7 +1594,7 @@
           <a:bodyPr wrap="square" lIns="0" tIns="0" rIns="0" bIns="0" rtlCol="0" anchor="ctr"/>
           <a:lstStyle/>
           <a:p>
-            <a:pPr indent="0" marL="0">
+            <a:pPr marL="0" indent="0">
               <a:buNone/>
             </a:pPr>
             <a:r>
@@ -1907,7 +1620,7 @@
         </p:nvSpPr>
         <p:spPr>
           <a:xfrm>
-            <a:off x="731520" y="3520440"/>
+            <a:off x="731520" y="2322835"/>
             <a:ext cx="7315200" cy="201168"/>
           </a:xfrm>
           <a:prstGeom prst="rect">
@@ -1920,11 +1633,11 @@
           <a:bodyPr wrap="square" lIns="0" tIns="0" rIns="0" bIns="0" rtlCol="0" anchor="ctr"/>
           <a:lstStyle/>
           <a:p>
-            <a:pPr indent="0" marL="0">
-              <a:buNone/>
-            </a:pPr>
-            <a:r>
-              <a:rPr lang="en-US" sz="900" spc="200" kern="0" dirty="0">
+            <a:pPr marL="0" indent="0">
+              <a:buNone/>
+            </a:pPr>
+            <a:r>
+              <a:rPr lang="en-US" sz="900" kern="0" spc="200" dirty="0">
                 <a:solidFill>
                   <a:srgbClr val="007A6A"/>
                 </a:solidFill>
@@ -1946,7 +1659,7 @@
         </p:nvSpPr>
         <p:spPr>
           <a:xfrm>
-            <a:off x="777240" y="3840480"/>
+            <a:off x="777240" y="2642875"/>
             <a:ext cx="54864" cy="54864"/>
           </a:xfrm>
           <a:prstGeom prst="rect">
@@ -1957,6 +1670,13 @@
           </a:solidFill>
           <a:ln/>
         </p:spPr>
+        <p:txBody>
+          <a:bodyPr/>
+          <a:lstStyle/>
+          <a:p>
+            <a:endParaRPr lang="zh-CN" altLang="en-US"/>
+          </a:p>
+        </p:txBody>
       </p:sp>
       <p:sp>
         <p:nvSpPr>
@@ -1966,7 +1686,7 @@
         </p:nvSpPr>
         <p:spPr>
           <a:xfrm>
-            <a:off x="960120" y="3785616"/>
+            <a:off x="960120" y="2588011"/>
             <a:ext cx="7315200" cy="182880"/>
           </a:xfrm>
           <a:prstGeom prst="rect">
@@ -1979,7 +1699,7 @@
           <a:bodyPr wrap="square" lIns="0" tIns="0" rIns="0" bIns="0" rtlCol="0" anchor="ctr"/>
           <a:lstStyle/>
           <a:p>
-            <a:pPr indent="0" marL="0">
+            <a:pPr marL="0" indent="0">
               <a:buNone/>
             </a:pPr>
             <a:r>
@@ -2005,7 +1725,7 @@
         </p:nvSpPr>
         <p:spPr>
           <a:xfrm>
-            <a:off x="777240" y="4041648"/>
+            <a:off x="777240" y="2844043"/>
             <a:ext cx="54864" cy="54864"/>
           </a:xfrm>
           <a:prstGeom prst="rect">
@@ -2016,6 +1736,13 @@
           </a:solidFill>
           <a:ln/>
         </p:spPr>
+        <p:txBody>
+          <a:bodyPr/>
+          <a:lstStyle/>
+          <a:p>
+            <a:endParaRPr lang="zh-CN" altLang="en-US"/>
+          </a:p>
+        </p:txBody>
       </p:sp>
       <p:sp>
         <p:nvSpPr>
@@ -2025,7 +1752,7 @@
         </p:nvSpPr>
         <p:spPr>
           <a:xfrm>
-            <a:off x="960120" y="3986784"/>
+            <a:off x="960120" y="2789179"/>
             <a:ext cx="7315200" cy="182880"/>
           </a:xfrm>
           <a:prstGeom prst="rect">
@@ -2038,7 +1765,7 @@
           <a:bodyPr wrap="square" lIns="0" tIns="0" rIns="0" bIns="0" rtlCol="0" anchor="ctr"/>
           <a:lstStyle/>
           <a:p>
-            <a:pPr indent="0" marL="0">
+            <a:pPr marL="0" indent="0">
               <a:buNone/>
             </a:pPr>
             <a:r>
@@ -2064,7 +1791,7 @@
         </p:nvSpPr>
         <p:spPr>
           <a:xfrm>
-            <a:off x="777240" y="4242816"/>
+            <a:off x="777240" y="3045211"/>
             <a:ext cx="54864" cy="54864"/>
           </a:xfrm>
           <a:prstGeom prst="rect">
@@ -2075,6 +1802,13 @@
           </a:solidFill>
           <a:ln/>
         </p:spPr>
+        <p:txBody>
+          <a:bodyPr/>
+          <a:lstStyle/>
+          <a:p>
+            <a:endParaRPr lang="zh-CN" altLang="en-US"/>
+          </a:p>
+        </p:txBody>
       </p:sp>
       <p:sp>
         <p:nvSpPr>
@@ -2084,7 +1818,7 @@
         </p:nvSpPr>
         <p:spPr>
           <a:xfrm>
-            <a:off x="960120" y="4187952"/>
+            <a:off x="960120" y="2990347"/>
             <a:ext cx="7315200" cy="182880"/>
           </a:xfrm>
           <a:prstGeom prst="rect">
@@ -2097,7 +1831,7 @@
           <a:bodyPr wrap="square" lIns="0" tIns="0" rIns="0" bIns="0" rtlCol="0" anchor="ctr"/>
           <a:lstStyle/>
           <a:p>
-            <a:pPr indent="0" marL="0">
+            <a:pPr marL="0" indent="0">
               <a:buNone/>
             </a:pPr>
             <a:r>
@@ -2123,7 +1857,7 @@
         </p:nvSpPr>
         <p:spPr>
           <a:xfrm>
-            <a:off x="777240" y="4443984"/>
+            <a:off x="777240" y="3246379"/>
             <a:ext cx="54864" cy="54864"/>
           </a:xfrm>
           <a:prstGeom prst="rect">
@@ -2134,6 +1868,13 @@
           </a:solidFill>
           <a:ln/>
         </p:spPr>
+        <p:txBody>
+          <a:bodyPr/>
+          <a:lstStyle/>
+          <a:p>
+            <a:endParaRPr lang="zh-CN" altLang="en-US"/>
+          </a:p>
+        </p:txBody>
       </p:sp>
       <p:sp>
         <p:nvSpPr>
@@ -2143,7 +1884,7 @@
         </p:nvSpPr>
         <p:spPr>
           <a:xfrm>
-            <a:off x="960120" y="4389120"/>
+            <a:off x="960120" y="3191515"/>
             <a:ext cx="7315200" cy="182880"/>
           </a:xfrm>
           <a:prstGeom prst="rect">
@@ -2156,7 +1897,7 @@
           <a:bodyPr wrap="square" lIns="0" tIns="0" rIns="0" bIns="0" rtlCol="0" anchor="ctr"/>
           <a:lstStyle/>
           <a:p>
-            <a:pPr indent="0" marL="0">
+            <a:pPr marL="0" indent="0">
               <a:buNone/>
             </a:pPr>
             <a:r>
@@ -2182,7 +1923,7 @@
         </p:nvSpPr>
         <p:spPr>
           <a:xfrm>
-            <a:off x="777240" y="4645152"/>
+            <a:off x="777240" y="3447547"/>
             <a:ext cx="54864" cy="54864"/>
           </a:xfrm>
           <a:prstGeom prst="rect">
@@ -2193,6 +1934,13 @@
           </a:solidFill>
           <a:ln/>
         </p:spPr>
+        <p:txBody>
+          <a:bodyPr/>
+          <a:lstStyle/>
+          <a:p>
+            <a:endParaRPr lang="zh-CN" altLang="en-US"/>
+          </a:p>
+        </p:txBody>
       </p:sp>
       <p:sp>
         <p:nvSpPr>
@@ -2202,7 +1950,7 @@
         </p:nvSpPr>
         <p:spPr>
           <a:xfrm>
-            <a:off x="960120" y="4590288"/>
+            <a:off x="960120" y="3392683"/>
             <a:ext cx="7315200" cy="182880"/>
           </a:xfrm>
           <a:prstGeom prst="rect">
@@ -2215,7 +1963,7 @@
           <a:bodyPr wrap="square" lIns="0" tIns="0" rIns="0" bIns="0" rtlCol="0" anchor="ctr"/>
           <a:lstStyle/>
           <a:p>
-            <a:pPr indent="0" marL="0">
+            <a:pPr marL="0" indent="0">
               <a:buNone/>
             </a:pPr>
             <a:r>
@@ -2241,7 +1989,7 @@
         </p:nvSpPr>
         <p:spPr>
           <a:xfrm>
-            <a:off x="777240" y="4846320"/>
+            <a:off x="777240" y="3648715"/>
             <a:ext cx="54864" cy="54864"/>
           </a:xfrm>
           <a:prstGeom prst="rect">
@@ -2252,6 +2000,13 @@
           </a:solidFill>
           <a:ln/>
         </p:spPr>
+        <p:txBody>
+          <a:bodyPr/>
+          <a:lstStyle/>
+          <a:p>
+            <a:endParaRPr lang="zh-CN" altLang="en-US"/>
+          </a:p>
+        </p:txBody>
       </p:sp>
       <p:sp>
         <p:nvSpPr>
@@ -2261,7 +2016,7 @@
         </p:nvSpPr>
         <p:spPr>
           <a:xfrm>
-            <a:off x="960120" y="4791456"/>
+            <a:off x="960120" y="3593851"/>
             <a:ext cx="7315200" cy="182880"/>
           </a:xfrm>
           <a:prstGeom prst="rect">
@@ -2274,7 +2029,7 @@
           <a:bodyPr wrap="square" lIns="0" tIns="0" rIns="0" bIns="0" rtlCol="0" anchor="ctr"/>
           <a:lstStyle/>
           <a:p>
-            <a:pPr indent="0" marL="0">
+            <a:pPr marL="0" indent="0">
               <a:buNone/>
             </a:pPr>
             <a:r>
@@ -2300,7 +2055,7 @@
         </p:nvSpPr>
         <p:spPr>
           <a:xfrm>
-            <a:off x="777240" y="5047488"/>
+            <a:off x="777240" y="3849883"/>
             <a:ext cx="54864" cy="54864"/>
           </a:xfrm>
           <a:prstGeom prst="rect">
@@ -2311,6 +2066,13 @@
           </a:solidFill>
           <a:ln/>
         </p:spPr>
+        <p:txBody>
+          <a:bodyPr/>
+          <a:lstStyle/>
+          <a:p>
+            <a:endParaRPr lang="zh-CN" altLang="en-US"/>
+          </a:p>
+        </p:txBody>
       </p:sp>
       <p:sp>
         <p:nvSpPr>
@@ -2320,7 +2082,7 @@
         </p:nvSpPr>
         <p:spPr>
           <a:xfrm>
-            <a:off x="960120" y="4992624"/>
+            <a:off x="960120" y="3795019"/>
             <a:ext cx="7315200" cy="182880"/>
           </a:xfrm>
           <a:prstGeom prst="rect">
@@ -2333,7 +2095,7 @@
           <a:bodyPr wrap="square" lIns="0" tIns="0" rIns="0" bIns="0" rtlCol="0" anchor="ctr"/>
           <a:lstStyle/>
           <a:p>
-            <a:pPr indent="0" marL="0">
+            <a:pPr marL="0" indent="0">
               <a:buNone/>
             </a:pPr>
             <a:r>
@@ -2372,11 +2134,11 @@
           <a:bodyPr wrap="square" rtlCol="0" anchor="ctr"/>
           <a:lstStyle/>
           <a:p>
-            <a:pPr indent="0" marL="0">
-              <a:buNone/>
-            </a:pPr>
-            <a:r>
-              <a:rPr lang="en-US" sz="650" spc="200" kern="0" dirty="0">
+            <a:pPr marL="0" indent="0">
+              <a:buNone/>
+            </a:pPr>
+            <a:r>
+              <a:rPr lang="en-US" sz="650" kern="0" spc="200" dirty="0">
                 <a:solidFill>
                   <a:srgbClr val="7E8D9E"/>
                 </a:solidFill>
@@ -2411,7 +2173,7 @@
           <a:bodyPr wrap="square" rtlCol="0" anchor="ctr"/>
           <a:lstStyle/>
           <a:p>
-            <a:pPr algn="r" indent="0" marL="0">
+            <a:pPr marL="0" indent="0" algn="r">
               <a:buNone/>
             </a:pPr>
             <a:r>
@@ -2437,7 +2199,7 @@
         </p:nvSpPr>
         <p:spPr>
           <a:xfrm>
-            <a:off x="502920" y="4754880"/>
+            <a:off x="561286" y="4787240"/>
             <a:ext cx="8138160" cy="0"/>
           </a:xfrm>
           <a:prstGeom prst="line">
@@ -2451,6 +2213,13 @@
             <a:prstDash val="solid"/>
           </a:ln>
         </p:spPr>
+        <p:txBody>
+          <a:bodyPr/>
+          <a:lstStyle/>
+          <a:p>
+            <a:endParaRPr lang="zh-CN" altLang="en-US"/>
+          </a:p>
+        </p:txBody>
       </p:sp>
     </p:spTree>
   </p:cSld>
@@ -2468,6 +2237,7 @@
         <a:solidFill>
           <a:srgbClr val="060E18"/>
         </a:solidFill>
+        <a:effectLst/>
       </p:bgPr>
     </p:bg>
     <p:spTree>
@@ -2503,6 +2273,13 @@
           </a:solidFill>
           <a:ln/>
         </p:spPr>
+        <p:txBody>
+          <a:bodyPr/>
+          <a:lstStyle/>
+          <a:p>
+            <a:endParaRPr lang="zh-CN" altLang="en-US"/>
+          </a:p>
+        </p:txBody>
       </p:sp>
       <p:sp>
         <p:nvSpPr>
@@ -2523,6 +2300,13 @@
           </a:solidFill>
           <a:ln/>
         </p:spPr>
+        <p:txBody>
+          <a:bodyPr/>
+          <a:lstStyle/>
+          <a:p>
+            <a:endParaRPr lang="zh-CN" altLang="en-US"/>
+          </a:p>
+        </p:txBody>
       </p:sp>
       <p:sp>
         <p:nvSpPr>
@@ -2545,7 +2329,7 @@
           <a:bodyPr wrap="square" lIns="0" tIns="0" rIns="0" bIns="0" rtlCol="0" anchor="ctr"/>
           <a:lstStyle/>
           <a:p>
-            <a:pPr indent="0" marL="0">
+            <a:pPr marL="0" indent="0">
               <a:lnSpc>
                 <a:spcPct val="110000"/>
               </a:lnSpc>
@@ -2565,7 +2349,7 @@
             <a:endParaRPr lang="en-US" sz="3200" dirty="0"/>
           </a:p>
           <a:p>
-            <a:pPr indent="0" marL="0">
+            <a:pPr marL="0" indent="0">
               <a:lnSpc>
                 <a:spcPct val="110000"/>
               </a:lnSpc>
@@ -2608,6 +2392,13 @@
             <a:prstDash val="solid"/>
           </a:ln>
         </p:spPr>
+        <p:txBody>
+          <a:bodyPr/>
+          <a:lstStyle/>
+          <a:p>
+            <a:endParaRPr lang="zh-CN" altLang="en-US"/>
+          </a:p>
+        </p:txBody>
       </p:sp>
       <p:sp>
         <p:nvSpPr>
@@ -2630,11 +2421,11 @@
           <a:bodyPr wrap="square" lIns="0" tIns="0" rIns="0" bIns="0" rtlCol="0" anchor="ctr"/>
           <a:lstStyle/>
           <a:p>
-            <a:pPr indent="0" marL="0">
-              <a:buNone/>
-            </a:pPr>
-            <a:r>
-              <a:rPr lang="en-US" sz="3400" b="1" spc="300" kern="0" dirty="0">
+            <a:pPr marL="0" indent="0">
+              <a:buNone/>
+            </a:pPr>
+            <a:r>
+              <a:rPr lang="en-US" sz="3400" b="1" kern="0" spc="300" dirty="0">
                 <a:solidFill>
                   <a:srgbClr val="00BFA5"/>
                 </a:solidFill>
@@ -2667,6 +2458,13 @@
           </a:solidFill>
           <a:ln/>
         </p:spPr>
+        <p:txBody>
+          <a:bodyPr/>
+          <a:lstStyle/>
+          <a:p>
+            <a:endParaRPr lang="zh-CN" altLang="en-US"/>
+          </a:p>
+        </p:txBody>
       </p:sp>
       <p:sp>
         <p:nvSpPr>
@@ -2689,7 +2487,7 @@
           <a:bodyPr wrap="square" lIns="0" tIns="0" rIns="0" bIns="0" rtlCol="0" anchor="ctr"/>
           <a:lstStyle/>
           <a:p>
-            <a:pPr indent="0" marL="0">
+            <a:pPr marL="0" indent="0">
               <a:buNone/>
             </a:pPr>
             <a:r>
@@ -2726,6 +2524,13 @@
           </a:solidFill>
           <a:ln/>
         </p:spPr>
+        <p:txBody>
+          <a:bodyPr/>
+          <a:lstStyle/>
+          <a:p>
+            <a:endParaRPr lang="zh-CN" altLang="en-US"/>
+          </a:p>
+        </p:txBody>
       </p:sp>
       <p:sp>
         <p:nvSpPr>
@@ -2748,7 +2553,7 @@
           <a:bodyPr wrap="square" lIns="0" tIns="0" rIns="0" bIns="0" rtlCol="0" anchor="ctr"/>
           <a:lstStyle/>
           <a:p>
-            <a:pPr indent="0" marL="0">
+            <a:pPr marL="0" indent="0">
               <a:buNone/>
             </a:pPr>
             <a:r>
@@ -2785,6 +2590,13 @@
           </a:solidFill>
           <a:ln/>
         </p:spPr>
+        <p:txBody>
+          <a:bodyPr/>
+          <a:lstStyle/>
+          <a:p>
+            <a:endParaRPr lang="zh-CN" altLang="en-US"/>
+          </a:p>
+        </p:txBody>
       </p:sp>
       <p:sp>
         <p:nvSpPr>
@@ -2807,7 +2619,7 @@
           <a:bodyPr wrap="square" lIns="0" tIns="0" rIns="0" bIns="0" rtlCol="0" anchor="ctr"/>
           <a:lstStyle/>
           <a:p>
-            <a:pPr indent="0" marL="0">
+            <a:pPr marL="0" indent="0">
               <a:buNone/>
             </a:pPr>
             <a:r>
@@ -2844,6 +2656,13 @@
           </a:solidFill>
           <a:ln/>
         </p:spPr>
+        <p:txBody>
+          <a:bodyPr/>
+          <a:lstStyle/>
+          <a:p>
+            <a:endParaRPr lang="zh-CN" altLang="en-US"/>
+          </a:p>
+        </p:txBody>
       </p:sp>
       <p:sp>
         <p:nvSpPr>
@@ -2866,7 +2685,7 @@
           <a:bodyPr wrap="square" lIns="0" tIns="0" rIns="0" bIns="0" rtlCol="0" anchor="ctr"/>
           <a:lstStyle/>
           <a:p>
-            <a:pPr indent="0" marL="0">
+            <a:pPr marL="0" indent="0">
               <a:buNone/>
             </a:pPr>
             <a:r>
@@ -2903,6 +2722,13 @@
           </a:solidFill>
           <a:ln/>
         </p:spPr>
+        <p:txBody>
+          <a:bodyPr/>
+          <a:lstStyle/>
+          <a:p>
+            <a:endParaRPr lang="zh-CN" altLang="en-US"/>
+          </a:p>
+        </p:txBody>
       </p:sp>
       <p:sp>
         <p:nvSpPr>
@@ -2925,7 +2751,7 @@
           <a:bodyPr wrap="square" lIns="0" tIns="0" rIns="0" bIns="0" rtlCol="0" anchor="ctr"/>
           <a:lstStyle/>
           <a:p>
-            <a:pPr indent="0" marL="0">
+            <a:pPr marL="0" indent="0">
               <a:buNone/>
             </a:pPr>
             <a:r>
@@ -2962,6 +2788,13 @@
           </a:solidFill>
           <a:ln/>
         </p:spPr>
+        <p:txBody>
+          <a:bodyPr/>
+          <a:lstStyle/>
+          <a:p>
+            <a:endParaRPr lang="zh-CN" altLang="en-US"/>
+          </a:p>
+        </p:txBody>
       </p:sp>
       <p:sp>
         <p:nvSpPr>
@@ -2984,7 +2817,7 @@
           <a:bodyPr wrap="square" lIns="0" tIns="0" rIns="0" bIns="0" rtlCol="0" anchor="ctr"/>
           <a:lstStyle/>
           <a:p>
-            <a:pPr indent="0" marL="0">
+            <a:pPr marL="0" indent="0">
               <a:buNone/>
             </a:pPr>
             <a:r>
@@ -3021,6 +2854,13 @@
           </a:solidFill>
           <a:ln/>
         </p:spPr>
+        <p:txBody>
+          <a:bodyPr/>
+          <a:lstStyle/>
+          <a:p>
+            <a:endParaRPr lang="zh-CN" altLang="en-US"/>
+          </a:p>
+        </p:txBody>
       </p:sp>
       <p:sp>
         <p:nvSpPr>
@@ -3043,7 +2883,7 @@
           <a:bodyPr wrap="square" lIns="0" tIns="0" rIns="0" bIns="0" rtlCol="0" anchor="ctr"/>
           <a:lstStyle/>
           <a:p>
-            <a:pPr indent="0" marL="0">
+            <a:pPr marL="0" indent="0">
               <a:buNone/>
             </a:pPr>
             <a:r>
@@ -3083,6 +2923,13 @@
             <a:prstDash val="solid"/>
           </a:ln>
         </p:spPr>
+        <p:txBody>
+          <a:bodyPr/>
+          <a:lstStyle/>
+          <a:p>
+            <a:endParaRPr lang="zh-CN" altLang="en-US"/>
+          </a:p>
+        </p:txBody>
       </p:sp>
       <p:sp>
         <p:nvSpPr>
@@ -3105,7 +2952,7 @@
           <a:bodyPr wrap="square" lIns="0" tIns="0" rIns="0" bIns="0" rtlCol="0" anchor="ctr"/>
           <a:lstStyle/>
           <a:p>
-            <a:pPr indent="0" marL="0">
+            <a:pPr marL="0" indent="0">
               <a:buNone/>
             </a:pPr>
             <a:r>
@@ -3144,11 +2991,11 @@
           <a:bodyPr wrap="square" lIns="0" tIns="0" rIns="0" bIns="0" rtlCol="0" anchor="ctr"/>
           <a:lstStyle/>
           <a:p>
-            <a:pPr indent="0" marL="0">
-              <a:buNone/>
-            </a:pPr>
-            <a:r>
-              <a:rPr lang="en-US" sz="700" spc="150" kern="0" dirty="0">
+            <a:pPr marL="0" indent="0">
+              <a:buNone/>
+            </a:pPr>
+            <a:r>
+              <a:rPr lang="en-US" sz="700" kern="0" spc="150" dirty="0">
                 <a:solidFill>
                   <a:srgbClr val="7E8D9E"/>
                 </a:solidFill>
@@ -3178,6 +3025,7 @@
         <a:solidFill>
           <a:srgbClr val="060E18"/>
         </a:solidFill>
+        <a:effectLst/>
       </p:bgPr>
     </p:bg>
     <p:spTree>
@@ -3215,11 +3063,11 @@
           <a:bodyPr wrap="square" lIns="0" tIns="0" rIns="0" bIns="0" rtlCol="0" anchor="ctr"/>
           <a:lstStyle/>
           <a:p>
-            <a:pPr indent="0" marL="0">
-              <a:buNone/>
-            </a:pPr>
-            <a:r>
-              <a:rPr lang="en-US" sz="2700" b="1" dirty="0">
+            <a:pPr marL="0" indent="0">
+              <a:buNone/>
+            </a:pPr>
+            <a:r>
+              <a:rPr lang="en-US" sz="2400" b="1" dirty="0">
                 <a:solidFill>
                   <a:srgbClr val="EBE8E3"/>
                 </a:solidFill>
@@ -3229,7 +3077,7 @@
               </a:rPr>
               <a:t>Human in the Loop · Input Determines Output</a:t>
             </a:r>
-            <a:endParaRPr lang="en-US" sz="2700" dirty="0"/>
+            <a:endParaRPr lang="en-US" sz="2400" dirty="0"/>
           </a:p>
         </p:txBody>
       </p:sp>
@@ -3241,7 +3089,7 @@
         </p:nvSpPr>
         <p:spPr>
           <a:xfrm>
-            <a:off x="502920" y="868680"/>
+            <a:off x="502920" y="866864"/>
             <a:ext cx="1828800" cy="0"/>
           </a:xfrm>
           <a:prstGeom prst="line">
@@ -3255,6 +3103,13 @@
             <a:prstDash val="solid"/>
           </a:ln>
         </p:spPr>
+        <p:txBody>
+          <a:bodyPr/>
+          <a:lstStyle/>
+          <a:p>
+            <a:endParaRPr lang="zh-CN" altLang="en-US"/>
+          </a:p>
+        </p:txBody>
       </p:sp>
       <p:sp>
         <p:nvSpPr>
@@ -3275,6 +3130,13 @@
           </a:solidFill>
           <a:ln/>
         </p:spPr>
+        <p:txBody>
+          <a:bodyPr/>
+          <a:lstStyle/>
+          <a:p>
+            <a:endParaRPr lang="zh-CN" altLang="en-US"/>
+          </a:p>
+        </p:txBody>
       </p:sp>
       <p:sp>
         <p:nvSpPr>
@@ -3295,6 +3157,13 @@
           </a:solidFill>
           <a:ln/>
         </p:spPr>
+        <p:txBody>
+          <a:bodyPr/>
+          <a:lstStyle/>
+          <a:p>
+            <a:endParaRPr lang="zh-CN" altLang="en-US"/>
+          </a:p>
+        </p:txBody>
       </p:sp>
       <p:sp>
         <p:nvSpPr>
@@ -3317,7 +3186,7 @@
           <a:bodyPr wrap="square" lIns="0" tIns="0" rIns="0" bIns="0" rtlCol="0" anchor="ctr"/>
           <a:lstStyle/>
           <a:p>
-            <a:pPr indent="0" marL="0">
+            <a:pPr marL="0" indent="0">
               <a:buNone/>
             </a:pPr>
             <a:r>
@@ -3356,7 +3225,7 @@
           <a:bodyPr wrap="square" lIns="0" tIns="0" rIns="0" bIns="0" rtlCol="0" anchor="ctr"/>
           <a:lstStyle/>
           <a:p>
-            <a:pPr indent="0" marL="0">
+            <a:pPr marL="0" indent="0">
               <a:lnSpc>
                 <a:spcPct val="160000"/>
               </a:lnSpc>
@@ -3396,6 +3265,13 @@
           </a:solidFill>
           <a:ln/>
         </p:spPr>
+        <p:txBody>
+          <a:bodyPr/>
+          <a:lstStyle/>
+          <a:p>
+            <a:endParaRPr lang="zh-CN" altLang="en-US"/>
+          </a:p>
+        </p:txBody>
       </p:sp>
       <p:sp>
         <p:nvSpPr>
@@ -3418,7 +3294,7 @@
           <a:bodyPr wrap="square" lIns="0" tIns="0" rIns="0" bIns="0" rtlCol="0" anchor="ctr"/>
           <a:lstStyle/>
           <a:p>
-            <a:pPr indent="0" marL="0">
+            <a:pPr marL="0" indent="0">
               <a:buNone/>
             </a:pPr>
             <a:r>
@@ -3455,6 +3331,13 @@
           </a:solidFill>
           <a:ln/>
         </p:spPr>
+        <p:txBody>
+          <a:bodyPr/>
+          <a:lstStyle/>
+          <a:p>
+            <a:endParaRPr lang="zh-CN" altLang="en-US"/>
+          </a:p>
+        </p:txBody>
       </p:sp>
       <p:sp>
         <p:nvSpPr>
@@ -3477,7 +3360,7 @@
           <a:bodyPr wrap="square" lIns="0" tIns="0" rIns="0" bIns="0" rtlCol="0" anchor="ctr"/>
           <a:lstStyle/>
           <a:p>
-            <a:pPr indent="0" marL="0">
+            <a:pPr marL="0" indent="0">
               <a:lnSpc>
                 <a:spcPct val="130000"/>
               </a:lnSpc>
@@ -3517,6 +3400,13 @@
           </a:solidFill>
           <a:ln/>
         </p:spPr>
+        <p:txBody>
+          <a:bodyPr/>
+          <a:lstStyle/>
+          <a:p>
+            <a:endParaRPr lang="zh-CN" altLang="en-US"/>
+          </a:p>
+        </p:txBody>
       </p:sp>
       <p:sp>
         <p:nvSpPr>
@@ -3539,7 +3429,7 @@
           <a:bodyPr wrap="square" lIns="0" tIns="0" rIns="0" bIns="0" rtlCol="0" anchor="ctr"/>
           <a:lstStyle/>
           <a:p>
-            <a:pPr indent="0" marL="0">
+            <a:pPr marL="0" indent="0">
               <a:buNone/>
             </a:pPr>
             <a:r>
@@ -3578,7 +3468,7 @@
           <a:bodyPr wrap="square" lIns="0" tIns="0" rIns="0" bIns="0" rtlCol="0" anchor="ctr"/>
           <a:lstStyle/>
           <a:p>
-            <a:pPr indent="0" marL="0">
+            <a:pPr marL="0" indent="0">
               <a:lnSpc>
                 <a:spcPct val="150000"/>
               </a:lnSpc>
@@ -3620,11 +3510,11 @@
           <a:bodyPr wrap="square" rtlCol="0" anchor="ctr"/>
           <a:lstStyle/>
           <a:p>
-            <a:pPr indent="0" marL="0">
-              <a:buNone/>
-            </a:pPr>
-            <a:r>
-              <a:rPr lang="en-US" sz="650" spc="200" kern="0" dirty="0">
+            <a:pPr marL="0" indent="0">
+              <a:buNone/>
+            </a:pPr>
+            <a:r>
+              <a:rPr lang="en-US" sz="650" kern="0" spc="200" dirty="0">
                 <a:solidFill>
                   <a:srgbClr val="7E8D9E"/>
                 </a:solidFill>
@@ -3659,7 +3549,7 @@
           <a:bodyPr wrap="square" rtlCol="0" anchor="ctr"/>
           <a:lstStyle/>
           <a:p>
-            <a:pPr algn="r" indent="0" marL="0">
+            <a:pPr marL="0" indent="0" algn="r">
               <a:buNone/>
             </a:pPr>
             <a:r>
@@ -3699,6 +3589,13 @@
             <a:prstDash val="solid"/>
           </a:ln>
         </p:spPr>
+        <p:txBody>
+          <a:bodyPr/>
+          <a:lstStyle/>
+          <a:p>
+            <a:endParaRPr lang="zh-CN" altLang="en-US"/>
+          </a:p>
+        </p:txBody>
       </p:sp>
     </p:spTree>
   </p:cSld>
@@ -3716,6 +3613,7 @@
         <a:solidFill>
           <a:srgbClr val="060E18"/>
         </a:solidFill>
+        <a:effectLst/>
       </p:bgPr>
     </p:bg>
     <p:spTree>
@@ -3753,7 +3651,7 @@
           <a:bodyPr wrap="square" lIns="0" tIns="0" rIns="0" bIns="0" rtlCol="0" anchor="ctr"/>
           <a:lstStyle/>
           <a:p>
-            <a:pPr indent="0" marL="0">
+            <a:pPr marL="0" indent="0">
               <a:buNone/>
             </a:pPr>
             <a:r>
@@ -3793,6 +3691,13 @@
             <a:prstDash val="solid"/>
           </a:ln>
         </p:spPr>
+        <p:txBody>
+          <a:bodyPr/>
+          <a:lstStyle/>
+          <a:p>
+            <a:endParaRPr lang="zh-CN" altLang="en-US"/>
+          </a:p>
+        </p:txBody>
       </p:sp>
       <p:sp>
         <p:nvSpPr>
@@ -3813,6 +3718,13 @@
           </a:solidFill>
           <a:ln/>
         </p:spPr>
+        <p:txBody>
+          <a:bodyPr/>
+          <a:lstStyle/>
+          <a:p>
+            <a:endParaRPr lang="zh-CN" altLang="en-US"/>
+          </a:p>
+        </p:txBody>
       </p:sp>
       <p:sp>
         <p:nvSpPr>
@@ -3835,11 +3747,11 @@
           <a:bodyPr wrap="square" lIns="0" tIns="0" rIns="0" bIns="0" rtlCol="0" anchor="ctr"/>
           <a:lstStyle/>
           <a:p>
-            <a:pPr indent="0" marL="0">
-              <a:buNone/>
-            </a:pPr>
-            <a:r>
-              <a:rPr lang="en-US" sz="800" spc="400" kern="0" dirty="0">
+            <a:pPr marL="0" indent="0">
+              <a:buNone/>
+            </a:pPr>
+            <a:r>
+              <a:rPr lang="en-US" sz="800" kern="0" spc="400" dirty="0">
                 <a:solidFill>
                   <a:srgbClr val="7E8D9E"/>
                 </a:solidFill>
@@ -3874,7 +3786,7 @@
           <a:bodyPr wrap="square" lIns="0" tIns="0" rIns="0" bIns="0" rtlCol="0" anchor="ctr"/>
           <a:lstStyle/>
           <a:p>
-            <a:pPr indent="0" marL="0">
+            <a:pPr marL="0" indent="0">
               <a:buNone/>
             </a:pPr>
             <a:r>
@@ -3910,10 +3822,10 @@
           <a:ln/>
         </p:spPr>
         <p:txBody>
-          <a:bodyPr wrap="square" lIns="0" tIns="0" rIns="0" bIns="0" rtlCol="0" anchor="ctr"/>
-          <a:lstStyle/>
-          <a:p>
-            <a:pPr indent="0" marL="0">
+          <a:bodyPr wrap="square" lIns="0" tIns="0" rIns="0" bIns="0" rtlCol="0" anchor="t"/>
+          <a:lstStyle/>
+          <a:p>
+            <a:pPr marL="0" indent="0">
               <a:buNone/>
             </a:pPr>
             <a:r>
@@ -3952,7 +3864,7 @@
           <a:bodyPr wrap="square" lIns="0" tIns="0" rIns="0" bIns="0" rtlCol="0" anchor="ctr"/>
           <a:lstStyle/>
           <a:p>
-            <a:pPr indent="0" marL="0">
+            <a:pPr marL="0" indent="0">
               <a:buNone/>
             </a:pPr>
             <a:r>
@@ -3988,10 +3900,10 @@
           <a:ln/>
         </p:spPr>
         <p:txBody>
-          <a:bodyPr wrap="square" lIns="0" tIns="0" rIns="0" bIns="0" rtlCol="0" anchor="ctr"/>
-          <a:lstStyle/>
-          <a:p>
-            <a:pPr indent="0" marL="0">
+          <a:bodyPr wrap="square" lIns="0" tIns="0" rIns="0" bIns="0" rtlCol="0" anchor="t"/>
+          <a:lstStyle/>
+          <a:p>
+            <a:pPr marL="0" indent="0">
               <a:buNone/>
             </a:pPr>
             <a:r>
@@ -4030,7 +3942,7 @@
           <a:bodyPr wrap="square" lIns="0" tIns="0" rIns="0" bIns="0" rtlCol="0" anchor="ctr"/>
           <a:lstStyle/>
           <a:p>
-            <a:pPr indent="0" marL="0">
+            <a:pPr marL="0" indent="0">
               <a:buNone/>
             </a:pPr>
             <a:r>
@@ -4066,10 +3978,10 @@
           <a:ln/>
         </p:spPr>
         <p:txBody>
-          <a:bodyPr wrap="square" lIns="0" tIns="0" rIns="0" bIns="0" rtlCol="0" anchor="ctr"/>
-          <a:lstStyle/>
-          <a:p>
-            <a:pPr indent="0" marL="0">
+          <a:bodyPr wrap="square" lIns="0" tIns="0" rIns="0" bIns="0" rtlCol="0" anchor="t"/>
+          <a:lstStyle/>
+          <a:p>
+            <a:pPr marL="0" indent="0">
               <a:buNone/>
             </a:pPr>
             <a:r>
@@ -4108,7 +4020,7 @@
           <a:bodyPr wrap="square" lIns="0" tIns="0" rIns="0" bIns="0" rtlCol="0" anchor="ctr"/>
           <a:lstStyle/>
           <a:p>
-            <a:pPr indent="0" marL="0">
+            <a:pPr marL="0" indent="0">
               <a:buNone/>
             </a:pPr>
             <a:r>
@@ -4144,10 +4056,10 @@
           <a:ln/>
         </p:spPr>
         <p:txBody>
-          <a:bodyPr wrap="square" lIns="0" tIns="0" rIns="0" bIns="0" rtlCol="0" anchor="ctr"/>
-          <a:lstStyle/>
-          <a:p>
-            <a:pPr indent="0" marL="0">
+          <a:bodyPr wrap="square" lIns="0" tIns="0" rIns="0" bIns="0" rtlCol="0" anchor="t"/>
+          <a:lstStyle/>
+          <a:p>
+            <a:pPr marL="0" indent="0">
               <a:buNone/>
             </a:pPr>
             <a:r>
@@ -4186,7 +4098,7 @@
           <a:bodyPr wrap="square" lIns="0" tIns="0" rIns="0" bIns="0" rtlCol="0" anchor="ctr"/>
           <a:lstStyle/>
           <a:p>
-            <a:pPr indent="0" marL="0">
+            <a:pPr marL="0" indent="0">
               <a:buNone/>
             </a:pPr>
             <a:r>
@@ -4222,10 +4134,10 @@
           <a:ln/>
         </p:spPr>
         <p:txBody>
-          <a:bodyPr wrap="square" lIns="0" tIns="0" rIns="0" bIns="0" rtlCol="0" anchor="ctr"/>
-          <a:lstStyle/>
-          <a:p>
-            <a:pPr indent="0" marL="0">
+          <a:bodyPr wrap="square" lIns="0" tIns="0" rIns="0" bIns="0" rtlCol="0" anchor="t"/>
+          <a:lstStyle/>
+          <a:p>
+            <a:pPr marL="0" indent="0">
               <a:buNone/>
             </a:pPr>
             <a:r>
@@ -4264,7 +4176,7 @@
           <a:bodyPr wrap="square" lIns="0" tIns="0" rIns="0" bIns="0" rtlCol="0" anchor="ctr"/>
           <a:lstStyle/>
           <a:p>
-            <a:pPr indent="0" marL="0">
+            <a:pPr marL="0" indent="0">
               <a:buNone/>
             </a:pPr>
             <a:r>
@@ -4300,10 +4212,10 @@
           <a:ln/>
         </p:spPr>
         <p:txBody>
-          <a:bodyPr wrap="square" lIns="0" tIns="0" rIns="0" bIns="0" rtlCol="0" anchor="ctr"/>
-          <a:lstStyle/>
-          <a:p>
-            <a:pPr indent="0" marL="0">
+          <a:bodyPr wrap="square" lIns="0" tIns="0" rIns="0" bIns="0" rtlCol="0" anchor="t"/>
+          <a:lstStyle/>
+          <a:p>
+            <a:pPr marL="0" indent="0">
               <a:buNone/>
             </a:pPr>
             <a:r>
@@ -4342,7 +4254,7 @@
           <a:bodyPr wrap="square" lIns="0" tIns="0" rIns="0" bIns="0" rtlCol="0" anchor="ctr"/>
           <a:lstStyle/>
           <a:p>
-            <a:pPr indent="0" marL="0">
+            <a:pPr marL="0" indent="0">
               <a:buNone/>
             </a:pPr>
             <a:r>
@@ -4378,10 +4290,10 @@
           <a:ln/>
         </p:spPr>
         <p:txBody>
-          <a:bodyPr wrap="square" lIns="0" tIns="0" rIns="0" bIns="0" rtlCol="0" anchor="ctr"/>
-          <a:lstStyle/>
-          <a:p>
-            <a:pPr indent="0" marL="0">
+          <a:bodyPr wrap="square" lIns="0" tIns="0" rIns="0" bIns="0" rtlCol="0" anchor="t"/>
+          <a:lstStyle/>
+          <a:p>
+            <a:pPr marL="0" indent="0">
               <a:buNone/>
             </a:pPr>
             <a:r>
@@ -4420,11 +4332,11 @@
           <a:bodyPr wrap="square" lIns="0" tIns="0" rIns="0" bIns="0" rtlCol="0" anchor="ctr"/>
           <a:lstStyle/>
           <a:p>
-            <a:pPr indent="0" marL="0">
-              <a:buNone/>
-            </a:pPr>
-            <a:r>
-              <a:rPr lang="en-US" sz="750" spc="300" kern="0" dirty="0">
+            <a:pPr marL="0" indent="0">
+              <a:buNone/>
+            </a:pPr>
+            <a:r>
+              <a:rPr lang="en-US" sz="750" kern="0" spc="300" dirty="0">
                 <a:solidFill>
                   <a:srgbClr val="7E8D9E"/>
                 </a:solidFill>
@@ -4457,6 +4369,13 @@
           </a:solidFill>
           <a:ln/>
         </p:spPr>
+        <p:txBody>
+          <a:bodyPr/>
+          <a:lstStyle/>
+          <a:p>
+            <a:endParaRPr lang="zh-CN" altLang="en-US"/>
+          </a:p>
+        </p:txBody>
       </p:sp>
       <p:sp>
         <p:nvSpPr>
@@ -4477,6 +4396,13 @@
           </a:solidFill>
           <a:ln/>
         </p:spPr>
+        <p:txBody>
+          <a:bodyPr/>
+          <a:lstStyle/>
+          <a:p>
+            <a:endParaRPr lang="zh-CN" altLang="en-US"/>
+          </a:p>
+        </p:txBody>
       </p:sp>
       <p:sp>
         <p:nvSpPr>
@@ -4499,7 +4425,7 @@
           <a:bodyPr wrap="square" lIns="0" tIns="0" rIns="0" bIns="0" rtlCol="0" anchor="ctr"/>
           <a:lstStyle/>
           <a:p>
-            <a:pPr algn="ctr" indent="0" marL="0">
+            <a:pPr marL="0" indent="0" algn="ctr">
               <a:lnSpc>
                 <a:spcPct val="110000"/>
               </a:lnSpc>
@@ -4519,7 +4445,7 @@
             <a:endParaRPr lang="en-US" sz="650" dirty="0"/>
           </a:p>
           <a:p>
-            <a:pPr algn="ctr" indent="0" marL="0">
+            <a:pPr marL="0" indent="0" algn="ctr">
               <a:lnSpc>
                 <a:spcPct val="110000"/>
               </a:lnSpc>
@@ -4559,6 +4485,13 @@
           </a:solidFill>
           <a:ln/>
         </p:spPr>
+        <p:txBody>
+          <a:bodyPr/>
+          <a:lstStyle/>
+          <a:p>
+            <a:endParaRPr lang="zh-CN" altLang="en-US"/>
+          </a:p>
+        </p:txBody>
       </p:sp>
       <p:sp>
         <p:nvSpPr>
@@ -4581,11 +4514,11 @@
           <a:bodyPr wrap="square" lIns="0" tIns="0" rIns="0" bIns="0" rtlCol="0" anchor="ctr"/>
           <a:lstStyle/>
           <a:p>
-            <a:pPr indent="0" marL="0">
-              <a:buNone/>
-            </a:pPr>
-            <a:r>
-              <a:rPr lang="en-US" sz="800" spc="400" kern="0" dirty="0">
+            <a:pPr marL="0" indent="0">
+              <a:buNone/>
+            </a:pPr>
+            <a:r>
+              <a:rPr lang="en-US" sz="800" kern="0" spc="400" dirty="0">
                 <a:solidFill>
                   <a:srgbClr val="0A0A0A"/>
                 </a:solidFill>
@@ -4620,7 +4553,7 @@
           <a:bodyPr wrap="square" lIns="0" tIns="0" rIns="0" bIns="0" rtlCol="0" anchor="ctr"/>
           <a:lstStyle/>
           <a:p>
-            <a:pPr indent="0" marL="0">
+            <a:pPr marL="0" indent="0">
               <a:buNone/>
             </a:pPr>
             <a:r>
@@ -4656,10 +4589,10 @@
           <a:ln/>
         </p:spPr>
         <p:txBody>
-          <a:bodyPr wrap="square" lIns="0" tIns="0" rIns="0" bIns="0" rtlCol="0" anchor="ctr"/>
-          <a:lstStyle/>
-          <a:p>
-            <a:pPr indent="0" marL="0">
+          <a:bodyPr wrap="square" lIns="0" tIns="0" rIns="0" bIns="0" rtlCol="0" anchor="t"/>
+          <a:lstStyle/>
+          <a:p>
+            <a:pPr marL="0" indent="0">
               <a:buNone/>
             </a:pPr>
             <a:r>
@@ -4698,7 +4631,7 @@
           <a:bodyPr wrap="square" lIns="0" tIns="0" rIns="0" bIns="0" rtlCol="0" anchor="ctr"/>
           <a:lstStyle/>
           <a:p>
-            <a:pPr indent="0" marL="0">
+            <a:pPr marL="0" indent="0">
               <a:buNone/>
             </a:pPr>
             <a:r>
@@ -4734,10 +4667,10 @@
           <a:ln/>
         </p:spPr>
         <p:txBody>
-          <a:bodyPr wrap="square" lIns="0" tIns="0" rIns="0" bIns="0" rtlCol="0" anchor="ctr"/>
-          <a:lstStyle/>
-          <a:p>
-            <a:pPr indent="0" marL="0">
+          <a:bodyPr wrap="square" lIns="0" tIns="0" rIns="0" bIns="0" rtlCol="0" anchor="t"/>
+          <a:lstStyle/>
+          <a:p>
+            <a:pPr marL="0" indent="0">
               <a:buNone/>
             </a:pPr>
             <a:r>
@@ -4776,7 +4709,7 @@
           <a:bodyPr wrap="square" lIns="0" tIns="0" rIns="0" bIns="0" rtlCol="0" anchor="ctr"/>
           <a:lstStyle/>
           <a:p>
-            <a:pPr indent="0" marL="0">
+            <a:pPr marL="0" indent="0">
               <a:buNone/>
             </a:pPr>
             <a:r>
@@ -4812,10 +4745,10 @@
           <a:ln/>
         </p:spPr>
         <p:txBody>
-          <a:bodyPr wrap="square" lIns="0" tIns="0" rIns="0" bIns="0" rtlCol="0" anchor="ctr"/>
-          <a:lstStyle/>
-          <a:p>
-            <a:pPr indent="0" marL="0">
+          <a:bodyPr wrap="square" lIns="0" tIns="0" rIns="0" bIns="0" rtlCol="0" anchor="t"/>
+          <a:lstStyle/>
+          <a:p>
+            <a:pPr marL="0" indent="0">
               <a:buNone/>
             </a:pPr>
             <a:r>
@@ -4854,7 +4787,7 @@
           <a:bodyPr wrap="square" lIns="0" tIns="0" rIns="0" bIns="0" rtlCol="0" anchor="ctr"/>
           <a:lstStyle/>
           <a:p>
-            <a:pPr indent="0" marL="0">
+            <a:pPr marL="0" indent="0">
               <a:buNone/>
             </a:pPr>
             <a:r>
@@ -4890,10 +4823,10 @@
           <a:ln/>
         </p:spPr>
         <p:txBody>
-          <a:bodyPr wrap="square" lIns="0" tIns="0" rIns="0" bIns="0" rtlCol="0" anchor="ctr"/>
-          <a:lstStyle/>
-          <a:p>
-            <a:pPr indent="0" marL="0">
+          <a:bodyPr wrap="square" lIns="0" tIns="0" rIns="0" bIns="0" rtlCol="0" anchor="t"/>
+          <a:lstStyle/>
+          <a:p>
+            <a:pPr marL="0" indent="0">
               <a:buNone/>
             </a:pPr>
             <a:r>
@@ -4932,7 +4865,7 @@
           <a:bodyPr wrap="square" lIns="0" tIns="0" rIns="0" bIns="0" rtlCol="0" anchor="ctr"/>
           <a:lstStyle/>
           <a:p>
-            <a:pPr indent="0" marL="0">
+            <a:pPr marL="0" indent="0">
               <a:buNone/>
             </a:pPr>
             <a:r>
@@ -4968,10 +4901,10 @@
           <a:ln/>
         </p:spPr>
         <p:txBody>
-          <a:bodyPr wrap="square" lIns="0" tIns="0" rIns="0" bIns="0" rtlCol="0" anchor="ctr"/>
-          <a:lstStyle/>
-          <a:p>
-            <a:pPr indent="0" marL="0">
+          <a:bodyPr wrap="square" lIns="0" tIns="0" rIns="0" bIns="0" rtlCol="0" anchor="t"/>
+          <a:lstStyle/>
+          <a:p>
+            <a:pPr marL="0" indent="0">
               <a:buNone/>
             </a:pPr>
             <a:r>
@@ -5010,7 +4943,7 @@
           <a:bodyPr wrap="square" lIns="0" tIns="0" rIns="0" bIns="0" rtlCol="0" anchor="ctr"/>
           <a:lstStyle/>
           <a:p>
-            <a:pPr indent="0" marL="0">
+            <a:pPr marL="0" indent="0">
               <a:buNone/>
             </a:pPr>
             <a:r>
@@ -5046,10 +4979,10 @@
           <a:ln/>
         </p:spPr>
         <p:txBody>
-          <a:bodyPr wrap="square" lIns="0" tIns="0" rIns="0" bIns="0" rtlCol="0" anchor="ctr"/>
-          <a:lstStyle/>
-          <a:p>
-            <a:pPr indent="0" marL="0">
+          <a:bodyPr wrap="square" lIns="0" tIns="0" rIns="0" bIns="0" rtlCol="0" anchor="t"/>
+          <a:lstStyle/>
+          <a:p>
+            <a:pPr marL="0" indent="0">
               <a:buNone/>
             </a:pPr>
             <a:r>
@@ -5088,7 +5021,7 @@
           <a:bodyPr wrap="square" lIns="0" tIns="0" rIns="0" bIns="0" rtlCol="0" anchor="ctr"/>
           <a:lstStyle/>
           <a:p>
-            <a:pPr indent="0" marL="0">
+            <a:pPr marL="0" indent="0">
               <a:buNone/>
             </a:pPr>
             <a:r>
@@ -5124,10 +5057,10 @@
           <a:ln/>
         </p:spPr>
         <p:txBody>
-          <a:bodyPr wrap="square" lIns="0" tIns="0" rIns="0" bIns="0" rtlCol="0" anchor="ctr"/>
-          <a:lstStyle/>
-          <a:p>
-            <a:pPr indent="0" marL="0">
+          <a:bodyPr wrap="square" lIns="0" tIns="0" rIns="0" bIns="0" rtlCol="0" anchor="t"/>
+          <a:lstStyle/>
+          <a:p>
+            <a:pPr marL="0" indent="0">
               <a:buNone/>
             </a:pPr>
             <a:r>
@@ -5166,11 +5099,11 @@
           <a:bodyPr wrap="square" lIns="0" tIns="0" rIns="0" bIns="0" rtlCol="0" anchor="ctr"/>
           <a:lstStyle/>
           <a:p>
-            <a:pPr indent="0" marL="0">
-              <a:buNone/>
-            </a:pPr>
-            <a:r>
-              <a:rPr lang="en-US" sz="750" spc="300" kern="0" dirty="0">
+            <a:pPr marL="0" indent="0">
+              <a:buNone/>
+            </a:pPr>
+            <a:r>
+              <a:rPr lang="en-US" sz="750" kern="0" spc="300" dirty="0">
                 <a:solidFill>
                   <a:srgbClr val="0A0A0A"/>
                 </a:solidFill>
@@ -5205,11 +5138,11 @@
           <a:bodyPr wrap="square" rtlCol="0" anchor="ctr"/>
           <a:lstStyle/>
           <a:p>
-            <a:pPr indent="0" marL="0">
-              <a:buNone/>
-            </a:pPr>
-            <a:r>
-              <a:rPr lang="en-US" sz="650" spc="200" kern="0" dirty="0">
+            <a:pPr marL="0" indent="0">
+              <a:buNone/>
+            </a:pPr>
+            <a:r>
+              <a:rPr lang="en-US" sz="650" kern="0" spc="200" dirty="0">
                 <a:solidFill>
                   <a:srgbClr val="7E8D9E"/>
                 </a:solidFill>
@@ -5244,7 +5177,7 @@
           <a:bodyPr wrap="square" rtlCol="0" anchor="ctr"/>
           <a:lstStyle/>
           <a:p>
-            <a:pPr algn="r" indent="0" marL="0">
+            <a:pPr marL="0" indent="0" algn="r">
               <a:buNone/>
             </a:pPr>
             <a:r>
@@ -5284,6 +5217,13 @@
             <a:prstDash val="solid"/>
           </a:ln>
         </p:spPr>
+        <p:txBody>
+          <a:bodyPr/>
+          <a:lstStyle/>
+          <a:p>
+            <a:endParaRPr lang="zh-CN" altLang="en-US"/>
+          </a:p>
+        </p:txBody>
       </p:sp>
     </p:spTree>
   </p:cSld>
@@ -5301,6 +5241,7 @@
         <a:solidFill>
           <a:srgbClr val="060E18"/>
         </a:solidFill>
+        <a:effectLst/>
       </p:bgPr>
     </p:bg>
     <p:spTree>
@@ -5338,7 +5279,7 @@
           <a:bodyPr wrap="square" lIns="0" tIns="0" rIns="0" bIns="0" rtlCol="0" anchor="ctr"/>
           <a:lstStyle/>
           <a:p>
-            <a:pPr indent="0" marL="0">
+            <a:pPr marL="0" indent="0">
               <a:buNone/>
             </a:pPr>
             <a:r>
@@ -5378,6 +5319,13 @@
             <a:prstDash val="solid"/>
           </a:ln>
         </p:spPr>
+        <p:txBody>
+          <a:bodyPr/>
+          <a:lstStyle/>
+          <a:p>
+            <a:endParaRPr lang="zh-CN" altLang="en-US"/>
+          </a:p>
+        </p:txBody>
       </p:sp>
       <p:sp>
         <p:nvSpPr>
@@ -5398,6 +5346,13 @@
           </a:solidFill>
           <a:ln/>
         </p:spPr>
+        <p:txBody>
+          <a:bodyPr/>
+          <a:lstStyle/>
+          <a:p>
+            <a:endParaRPr lang="zh-CN" altLang="en-US"/>
+          </a:p>
+        </p:txBody>
       </p:sp>
       <p:sp>
         <p:nvSpPr>
@@ -5418,6 +5373,13 @@
           </a:solidFill>
           <a:ln/>
         </p:spPr>
+        <p:txBody>
+          <a:bodyPr/>
+          <a:lstStyle/>
+          <a:p>
+            <a:endParaRPr lang="zh-CN" altLang="en-US"/>
+          </a:p>
+        </p:txBody>
       </p:sp>
       <p:sp>
         <p:nvSpPr>
@@ -5440,21 +5402,24 @@
           <a:bodyPr wrap="square" lIns="0" tIns="0" rIns="0" bIns="0" rtlCol="0" anchor="ctr"/>
           <a:lstStyle/>
           <a:p>
-            <a:pPr indent="0" marL="0">
-              <a:buNone/>
-            </a:pPr>
-            <a:r>
-              <a:rPr lang="en-US" sz="700" spc="300" kern="0" dirty="0">
+            <a:pPr marL="0" indent="0">
+              <a:buNone/>
+            </a:pPr>
+            <a:r>
+              <a:rPr lang="en-US" sz="700" kern="0" spc="300" dirty="0">
                 <a:solidFill>
                   <a:srgbClr val="00BFA5"/>
                 </a:solidFill>
-                <a:latin typeface="Calibri" pitchFamily="34" charset="0"/>
-                <a:ea typeface="Calibri" pitchFamily="34" charset="-122"/>
-                <a:cs typeface="Calibri" pitchFamily="34" charset="-120"/>
+                <a:latin typeface="Arial" panose="020B0604020202020204" pitchFamily="34" charset="0"/>
+                <a:ea typeface="Calibri" pitchFamily="34" charset="-122"/>
+                <a:cs typeface="Arial" panose="020B0604020202020204" pitchFamily="34" charset="0"/>
               </a:rPr>
               <a:t>VOICE OF CUSTOMER</a:t>
             </a:r>
-            <a:endParaRPr lang="en-US" sz="700" dirty="0"/>
+            <a:endParaRPr lang="en-US" sz="700" dirty="0">
+              <a:latin typeface="Arial" panose="020B0604020202020204" pitchFamily="34" charset="0"/>
+              <a:cs typeface="Arial" panose="020B0604020202020204" pitchFamily="34" charset="0"/>
+            </a:endParaRPr>
           </a:p>
         </p:txBody>
       </p:sp>
@@ -5479,7 +5444,7 @@
           <a:bodyPr wrap="square" lIns="0" tIns="0" rIns="0" bIns="0" rtlCol="0" anchor="ctr"/>
           <a:lstStyle/>
           <a:p>
-            <a:pPr indent="0" marL="0">
+            <a:pPr marL="0" indent="0">
               <a:lnSpc>
                 <a:spcPct val="145000"/>
               </a:lnSpc>
@@ -5519,6 +5484,13 @@
           </a:solidFill>
           <a:ln/>
         </p:spPr>
+        <p:txBody>
+          <a:bodyPr/>
+          <a:lstStyle/>
+          <a:p>
+            <a:endParaRPr lang="zh-CN" altLang="en-US"/>
+          </a:p>
+        </p:txBody>
       </p:sp>
       <p:sp>
         <p:nvSpPr>
@@ -5541,21 +5513,24 @@
           <a:bodyPr wrap="square" lIns="0" tIns="0" rIns="0" bIns="0" rtlCol="0" anchor="ctr"/>
           <a:lstStyle/>
           <a:p>
-            <a:pPr indent="0" marL="0">
-              <a:buNone/>
-            </a:pPr>
-            <a:r>
-              <a:rPr lang="en-US" sz="700" spc="300" kern="0" dirty="0">
+            <a:pPr marL="0" indent="0">
+              <a:buNone/>
+            </a:pPr>
+            <a:r>
+              <a:rPr lang="en-US" sz="700" kern="0" spc="300" dirty="0">
                 <a:solidFill>
                   <a:srgbClr val="0A0A0A"/>
                 </a:solidFill>
-                <a:latin typeface="Calibri" pitchFamily="34" charset="0"/>
-                <a:ea typeface="Calibri" pitchFamily="34" charset="-122"/>
-                <a:cs typeface="Calibri" pitchFamily="34" charset="-120"/>
+                <a:latin typeface="Arial" panose="020B0604020202020204" pitchFamily="34" charset="0"/>
+                <a:ea typeface="Calibri" pitchFamily="34" charset="-122"/>
+                <a:cs typeface="Arial" panose="020B0604020202020204" pitchFamily="34" charset="0"/>
               </a:rPr>
               <a:t>AI OUTPUT: CTQs + TEST METHODS</a:t>
             </a:r>
-            <a:endParaRPr lang="en-US" sz="700" dirty="0"/>
+            <a:endParaRPr lang="en-US" sz="700" dirty="0">
+              <a:latin typeface="Arial" panose="020B0604020202020204" pitchFamily="34" charset="0"/>
+              <a:cs typeface="Arial" panose="020B0604020202020204" pitchFamily="34" charset="0"/>
+            </a:endParaRPr>
           </a:p>
         </p:txBody>
       </p:sp>
@@ -5580,7 +5555,7 @@
           <a:bodyPr wrap="square" lIns="0" tIns="0" rIns="0" bIns="0" rtlCol="0" anchor="ctr"/>
           <a:lstStyle/>
           <a:p>
-            <a:pPr indent="0" marL="0">
+            <a:pPr marL="0" indent="0">
               <a:buNone/>
             </a:pPr>
             <a:r>
@@ -5619,7 +5594,7 @@
           <a:bodyPr wrap="square" lIns="0" tIns="0" rIns="0" bIns="0" rtlCol="0" anchor="ctr"/>
           <a:lstStyle/>
           <a:p>
-            <a:pPr algn="r" indent="0" marL="0">
+            <a:pPr marL="0" indent="0" algn="r">
               <a:buNone/>
             </a:pPr>
             <a:r>
@@ -5658,7 +5633,7 @@
           <a:bodyPr wrap="square" lIns="0" tIns="0" rIns="0" bIns="0" rtlCol="0" anchor="ctr"/>
           <a:lstStyle/>
           <a:p>
-            <a:pPr indent="0" marL="0">
+            <a:pPr marL="0" indent="0">
               <a:buNone/>
             </a:pPr>
             <a:r>
@@ -5697,7 +5672,7 @@
           <a:bodyPr wrap="square" lIns="0" tIns="0" rIns="0" bIns="0" rtlCol="0" anchor="ctr"/>
           <a:lstStyle/>
           <a:p>
-            <a:pPr algn="r" indent="0" marL="0">
+            <a:pPr marL="0" indent="0" algn="r">
               <a:buNone/>
             </a:pPr>
             <a:r>
@@ -5736,7 +5711,7 @@
           <a:bodyPr wrap="square" lIns="0" tIns="0" rIns="0" bIns="0" rtlCol="0" anchor="ctr"/>
           <a:lstStyle/>
           <a:p>
-            <a:pPr indent="0" marL="0">
+            <a:pPr marL="0" indent="0">
               <a:buNone/>
             </a:pPr>
             <a:r>
@@ -5775,7 +5750,7 @@
           <a:bodyPr wrap="square" lIns="0" tIns="0" rIns="0" bIns="0" rtlCol="0" anchor="ctr"/>
           <a:lstStyle/>
           <a:p>
-            <a:pPr algn="r" indent="0" marL="0">
+            <a:pPr marL="0" indent="0" algn="r">
               <a:buNone/>
             </a:pPr>
             <a:r>
@@ -5814,7 +5789,7 @@
           <a:bodyPr wrap="square" lIns="0" tIns="0" rIns="0" bIns="0" rtlCol="0" anchor="ctr"/>
           <a:lstStyle/>
           <a:p>
-            <a:pPr indent="0" marL="0">
+            <a:pPr marL="0" indent="0">
               <a:buNone/>
             </a:pPr>
             <a:r>
@@ -5853,7 +5828,7 @@
           <a:bodyPr wrap="square" lIns="0" tIns="0" rIns="0" bIns="0" rtlCol="0" anchor="ctr"/>
           <a:lstStyle/>
           <a:p>
-            <a:pPr algn="r" indent="0" marL="0">
+            <a:pPr marL="0" indent="0" algn="r">
               <a:buNone/>
             </a:pPr>
             <a:r>
@@ -5892,7 +5867,7 @@
           <a:bodyPr wrap="square" lIns="0" tIns="0" rIns="0" bIns="0" rtlCol="0" anchor="ctr"/>
           <a:lstStyle/>
           <a:p>
-            <a:pPr indent="0" marL="0">
+            <a:pPr marL="0" indent="0">
               <a:buNone/>
             </a:pPr>
             <a:r>
@@ -5931,7 +5906,7 @@
           <a:bodyPr wrap="square" lIns="0" tIns="0" rIns="0" bIns="0" rtlCol="0" anchor="ctr"/>
           <a:lstStyle/>
           <a:p>
-            <a:pPr algn="r" indent="0" marL="0">
+            <a:pPr marL="0" indent="0" algn="r">
               <a:buNone/>
             </a:pPr>
             <a:r>
@@ -5970,7 +5945,7 @@
           <a:bodyPr wrap="square" lIns="0" tIns="0" rIns="0" bIns="0" rtlCol="0" anchor="ctr"/>
           <a:lstStyle/>
           <a:p>
-            <a:pPr indent="0" marL="0">
+            <a:pPr marL="0" indent="0">
               <a:buNone/>
             </a:pPr>
             <a:r>
@@ -6009,7 +5984,7 @@
           <a:bodyPr wrap="square" lIns="0" tIns="0" rIns="0" bIns="0" rtlCol="0" anchor="ctr"/>
           <a:lstStyle/>
           <a:p>
-            <a:pPr algn="r" indent="0" marL="0">
+            <a:pPr marL="0" indent="0" algn="r">
               <a:buNone/>
             </a:pPr>
             <a:r>
@@ -6046,6 +6021,13 @@
           </a:solidFill>
           <a:ln/>
         </p:spPr>
+        <p:txBody>
+          <a:bodyPr/>
+          <a:lstStyle/>
+          <a:p>
+            <a:endParaRPr lang="zh-CN" altLang="en-US"/>
+          </a:p>
+        </p:txBody>
       </p:sp>
       <p:sp>
         <p:nvSpPr>
@@ -6066,6 +6048,13 @@
           </a:solidFill>
           <a:ln/>
         </p:spPr>
+        <p:txBody>
+          <a:bodyPr/>
+          <a:lstStyle/>
+          <a:p>
+            <a:endParaRPr lang="zh-CN" altLang="en-US"/>
+          </a:p>
+        </p:txBody>
       </p:sp>
       <p:sp>
         <p:nvSpPr>
@@ -6088,14 +6077,14 @@
           <a:bodyPr wrap="square" lIns="0" tIns="0" rIns="0" bIns="0" rtlCol="0" anchor="ctr"/>
           <a:lstStyle/>
           <a:p>
-            <a:pPr indent="0" marL="0">
+            <a:pPr marL="0" indent="0">
               <a:lnSpc>
                 <a:spcPct val="120000"/>
               </a:lnSpc>
               <a:buNone/>
             </a:pPr>
             <a:r>
-              <a:rPr lang="en-US" sz="800" b="1" spc="150" kern="0" dirty="0">
+              <a:rPr lang="en-US" sz="800" b="1" kern="0" spc="150" dirty="0">
                 <a:solidFill>
                   <a:srgbClr val="00BFA5"/>
                 </a:solidFill>
@@ -6108,14 +6097,14 @@
             <a:endParaRPr lang="en-US" sz="800" dirty="0"/>
           </a:p>
           <a:p>
-            <a:pPr indent="0" marL="0">
+            <a:pPr marL="0" indent="0">
               <a:lnSpc>
                 <a:spcPct val="120000"/>
               </a:lnSpc>
               <a:buNone/>
             </a:pPr>
             <a:r>
-              <a:rPr lang="en-US" sz="800" b="1" spc="150" kern="0" dirty="0">
+              <a:rPr lang="en-US" sz="800" b="1" kern="0" spc="150" dirty="0">
                 <a:solidFill>
                   <a:srgbClr val="00BFA5"/>
                 </a:solidFill>
@@ -6150,7 +6139,7 @@
           <a:bodyPr wrap="square" lIns="0" tIns="0" rIns="0" bIns="0" rtlCol="0" anchor="ctr"/>
           <a:lstStyle/>
           <a:p>
-            <a:pPr indent="0" marL="0">
+            <a:pPr marL="0" indent="0">
               <a:lnSpc>
                 <a:spcPct val="140000"/>
               </a:lnSpc>
@@ -6170,7 +6159,7 @@
             <a:endParaRPr lang="en-US" sz="800" dirty="0"/>
           </a:p>
           <a:p>
-            <a:pPr indent="0" marL="0">
+            <a:pPr marL="0" indent="0">
               <a:lnSpc>
                 <a:spcPct val="140000"/>
               </a:lnSpc>
@@ -6190,7 +6179,7 @@
             <a:endParaRPr lang="en-US" sz="800" dirty="0"/>
           </a:p>
           <a:p>
-            <a:pPr indent="0" marL="0">
+            <a:pPr marL="0" indent="0">
               <a:lnSpc>
                 <a:spcPct val="140000"/>
               </a:lnSpc>
@@ -6230,6 +6219,13 @@
           </a:solidFill>
           <a:ln/>
         </p:spPr>
+        <p:txBody>
+          <a:bodyPr/>
+          <a:lstStyle/>
+          <a:p>
+            <a:endParaRPr lang="zh-CN" altLang="en-US"/>
+          </a:p>
+        </p:txBody>
       </p:sp>
       <p:sp>
         <p:nvSpPr>
@@ -6250,6 +6246,13 @@
           </a:solidFill>
           <a:ln/>
         </p:spPr>
+        <p:txBody>
+          <a:bodyPr/>
+          <a:lstStyle/>
+          <a:p>
+            <a:endParaRPr lang="zh-CN" altLang="en-US"/>
+          </a:p>
+        </p:txBody>
       </p:sp>
       <p:sp>
         <p:nvSpPr>
@@ -6272,14 +6275,14 @@
           <a:bodyPr wrap="square" lIns="0" tIns="0" rIns="0" bIns="0" rtlCol="0" anchor="ctr"/>
           <a:lstStyle/>
           <a:p>
-            <a:pPr indent="0" marL="0">
+            <a:pPr marL="0" indent="0">
               <a:lnSpc>
                 <a:spcPct val="120000"/>
               </a:lnSpc>
               <a:buNone/>
             </a:pPr>
             <a:r>
-              <a:rPr lang="en-US" sz="800" b="1" spc="150" kern="0" dirty="0">
+              <a:rPr lang="en-US" sz="800" b="1" kern="0" spc="150" dirty="0">
                 <a:solidFill>
                   <a:srgbClr val="00BFA5"/>
                 </a:solidFill>
@@ -6292,14 +6295,14 @@
             <a:endParaRPr lang="en-US" sz="800" dirty="0"/>
           </a:p>
           <a:p>
-            <a:pPr indent="0" marL="0">
+            <a:pPr marL="0" indent="0">
               <a:lnSpc>
                 <a:spcPct val="120000"/>
               </a:lnSpc>
               <a:buNone/>
             </a:pPr>
             <a:r>
-              <a:rPr lang="en-US" sz="800" b="1" spc="150" kern="0" dirty="0">
+              <a:rPr lang="en-US" sz="800" b="1" kern="0" spc="150" dirty="0">
                 <a:solidFill>
                   <a:srgbClr val="00BFA5"/>
                 </a:solidFill>
@@ -6334,7 +6337,7 @@
           <a:bodyPr wrap="square" lIns="0" tIns="0" rIns="0" bIns="0" rtlCol="0" anchor="ctr"/>
           <a:lstStyle/>
           <a:p>
-            <a:pPr indent="0" marL="0">
+            <a:pPr marL="0" indent="0">
               <a:lnSpc>
                 <a:spcPct val="140000"/>
               </a:lnSpc>
@@ -6354,7 +6357,7 @@
             <a:endParaRPr lang="en-US" sz="800" dirty="0"/>
           </a:p>
           <a:p>
-            <a:pPr indent="0" marL="0">
+            <a:pPr marL="0" indent="0">
               <a:lnSpc>
                 <a:spcPct val="140000"/>
               </a:lnSpc>
@@ -6374,7 +6377,7 @@
             <a:endParaRPr lang="en-US" sz="800" dirty="0"/>
           </a:p>
           <a:p>
-            <a:pPr indent="0" marL="0">
+            <a:pPr marL="0" indent="0">
               <a:lnSpc>
                 <a:spcPct val="140000"/>
               </a:lnSpc>
@@ -6414,6 +6417,13 @@
           </a:solidFill>
           <a:ln/>
         </p:spPr>
+        <p:txBody>
+          <a:bodyPr/>
+          <a:lstStyle/>
+          <a:p>
+            <a:endParaRPr lang="zh-CN" altLang="en-US"/>
+          </a:p>
+        </p:txBody>
       </p:sp>
       <p:sp>
         <p:nvSpPr>
@@ -6434,6 +6444,13 @@
           </a:solidFill>
           <a:ln/>
         </p:spPr>
+        <p:txBody>
+          <a:bodyPr/>
+          <a:lstStyle/>
+          <a:p>
+            <a:endParaRPr lang="zh-CN" altLang="en-US"/>
+          </a:p>
+        </p:txBody>
       </p:sp>
       <p:sp>
         <p:nvSpPr>
@@ -6456,14 +6473,14 @@
           <a:bodyPr wrap="square" lIns="0" tIns="0" rIns="0" bIns="0" rtlCol="0" anchor="ctr"/>
           <a:lstStyle/>
           <a:p>
-            <a:pPr indent="0" marL="0">
+            <a:pPr marL="0" indent="0">
               <a:lnSpc>
                 <a:spcPct val="120000"/>
               </a:lnSpc>
               <a:buNone/>
             </a:pPr>
             <a:r>
-              <a:rPr lang="en-US" sz="800" b="1" spc="150" kern="0" dirty="0">
+              <a:rPr lang="en-US" sz="800" b="1" kern="0" spc="150" dirty="0">
                 <a:solidFill>
                   <a:srgbClr val="00BFA5"/>
                 </a:solidFill>
@@ -6476,14 +6493,14 @@
             <a:endParaRPr lang="en-US" sz="800" dirty="0"/>
           </a:p>
           <a:p>
-            <a:pPr indent="0" marL="0">
+            <a:pPr marL="0" indent="0">
               <a:lnSpc>
                 <a:spcPct val="120000"/>
               </a:lnSpc>
               <a:buNone/>
             </a:pPr>
             <a:r>
-              <a:rPr lang="en-US" sz="800" b="1" spc="150" kern="0" dirty="0">
+              <a:rPr lang="en-US" sz="800" b="1" kern="0" spc="150" dirty="0">
                 <a:solidFill>
                   <a:srgbClr val="00BFA5"/>
                 </a:solidFill>
@@ -6518,7 +6535,7 @@
           <a:bodyPr wrap="square" lIns="0" tIns="0" rIns="0" bIns="0" rtlCol="0" anchor="ctr"/>
           <a:lstStyle/>
           <a:p>
-            <a:pPr indent="0" marL="0">
+            <a:pPr marL="0" indent="0">
               <a:lnSpc>
                 <a:spcPct val="140000"/>
               </a:lnSpc>
@@ -6538,7 +6555,7 @@
             <a:endParaRPr lang="en-US" sz="800" dirty="0"/>
           </a:p>
           <a:p>
-            <a:pPr indent="0" marL="0">
+            <a:pPr marL="0" indent="0">
               <a:lnSpc>
                 <a:spcPct val="140000"/>
               </a:lnSpc>
@@ -6558,7 +6575,7 @@
             <a:endParaRPr lang="en-US" sz="800" dirty="0"/>
           </a:p>
           <a:p>
-            <a:pPr indent="0" marL="0">
+            <a:pPr marL="0" indent="0">
               <a:lnSpc>
                 <a:spcPct val="140000"/>
               </a:lnSpc>
@@ -6598,6 +6615,13 @@
           </a:solidFill>
           <a:ln/>
         </p:spPr>
+        <p:txBody>
+          <a:bodyPr/>
+          <a:lstStyle/>
+          <a:p>
+            <a:endParaRPr lang="zh-CN" altLang="en-US"/>
+          </a:p>
+        </p:txBody>
       </p:sp>
       <p:sp>
         <p:nvSpPr>
@@ -6618,6 +6642,13 @@
           </a:solidFill>
           <a:ln/>
         </p:spPr>
+        <p:txBody>
+          <a:bodyPr/>
+          <a:lstStyle/>
+          <a:p>
+            <a:endParaRPr lang="zh-CN" altLang="en-US"/>
+          </a:p>
+        </p:txBody>
       </p:sp>
       <p:sp>
         <p:nvSpPr>
@@ -6640,14 +6671,14 @@
           <a:bodyPr wrap="square" lIns="0" tIns="0" rIns="0" bIns="0" rtlCol="0" anchor="ctr"/>
           <a:lstStyle/>
           <a:p>
-            <a:pPr indent="0" marL="0">
+            <a:pPr marL="0" indent="0">
               <a:lnSpc>
                 <a:spcPct val="120000"/>
               </a:lnSpc>
               <a:buNone/>
             </a:pPr>
             <a:r>
-              <a:rPr lang="en-US" sz="800" b="1" spc="150" kern="0" dirty="0">
+              <a:rPr lang="en-US" sz="800" b="1" kern="0" spc="150" dirty="0">
                 <a:solidFill>
                   <a:srgbClr val="00BFA5"/>
                 </a:solidFill>
@@ -6660,14 +6691,14 @@
             <a:endParaRPr lang="en-US" sz="800" dirty="0"/>
           </a:p>
           <a:p>
-            <a:pPr indent="0" marL="0">
+            <a:pPr marL="0" indent="0">
               <a:lnSpc>
                 <a:spcPct val="120000"/>
               </a:lnSpc>
               <a:buNone/>
             </a:pPr>
             <a:r>
-              <a:rPr lang="en-US" sz="800" b="1" spc="150" kern="0" dirty="0">
+              <a:rPr lang="en-US" sz="800" b="1" kern="0" spc="150" dirty="0">
                 <a:solidFill>
                   <a:srgbClr val="00BFA5"/>
                 </a:solidFill>
@@ -6702,7 +6733,7 @@
           <a:bodyPr wrap="square" lIns="0" tIns="0" rIns="0" bIns="0" rtlCol="0" anchor="ctr"/>
           <a:lstStyle/>
           <a:p>
-            <a:pPr indent="0" marL="0">
+            <a:pPr marL="0" indent="0">
               <a:lnSpc>
                 <a:spcPct val="140000"/>
               </a:lnSpc>
@@ -6722,7 +6753,7 @@
             <a:endParaRPr lang="en-US" sz="800" dirty="0"/>
           </a:p>
           <a:p>
-            <a:pPr indent="0" marL="0">
+            <a:pPr marL="0" indent="0">
               <a:lnSpc>
                 <a:spcPct val="140000"/>
               </a:lnSpc>
@@ -6742,7 +6773,7 @@
             <a:endParaRPr lang="en-US" sz="800" dirty="0"/>
           </a:p>
           <a:p>
-            <a:pPr indent="0" marL="0">
+            <a:pPr marL="0" indent="0">
               <a:lnSpc>
                 <a:spcPct val="140000"/>
               </a:lnSpc>
@@ -6784,11 +6815,11 @@
           <a:bodyPr wrap="square" rtlCol="0" anchor="ctr"/>
           <a:lstStyle/>
           <a:p>
-            <a:pPr indent="0" marL="0">
-              <a:buNone/>
-            </a:pPr>
-            <a:r>
-              <a:rPr lang="en-US" sz="650" spc="200" kern="0" dirty="0">
+            <a:pPr marL="0" indent="0">
+              <a:buNone/>
+            </a:pPr>
+            <a:r>
+              <a:rPr lang="en-US" sz="650" kern="0" spc="200" dirty="0">
                 <a:solidFill>
                   <a:srgbClr val="7E8D9E"/>
                 </a:solidFill>
@@ -6823,7 +6854,7 @@
           <a:bodyPr wrap="square" rtlCol="0" anchor="ctr"/>
           <a:lstStyle/>
           <a:p>
-            <a:pPr algn="r" indent="0" marL="0">
+            <a:pPr marL="0" indent="0" algn="r">
               <a:buNone/>
             </a:pPr>
             <a:r>
@@ -6863,6 +6894,13 @@
             <a:prstDash val="solid"/>
           </a:ln>
         </p:spPr>
+        <p:txBody>
+          <a:bodyPr/>
+          <a:lstStyle/>
+          <a:p>
+            <a:endParaRPr lang="zh-CN" altLang="en-US"/>
+          </a:p>
+        </p:txBody>
       </p:sp>
     </p:spTree>
   </p:cSld>
@@ -6880,6 +6918,7 @@
         <a:solidFill>
           <a:srgbClr val="060E18"/>
         </a:solidFill>
+        <a:effectLst/>
       </p:bgPr>
     </p:bg>
     <p:spTree>
@@ -6917,7 +6956,7 @@
           <a:bodyPr wrap="square" lIns="0" tIns="0" rIns="0" bIns="0" rtlCol="0" anchor="ctr"/>
           <a:lstStyle/>
           <a:p>
-            <a:pPr indent="0" marL="0">
+            <a:pPr marL="0" indent="0">
               <a:buNone/>
             </a:pPr>
             <a:r>
@@ -6957,6 +6996,13 @@
             <a:prstDash val="solid"/>
           </a:ln>
         </p:spPr>
+        <p:txBody>
+          <a:bodyPr/>
+          <a:lstStyle/>
+          <a:p>
+            <a:endParaRPr lang="zh-CN" altLang="en-US"/>
+          </a:p>
+        </p:txBody>
       </p:sp>
       <p:sp>
         <p:nvSpPr>
@@ -6977,6 +7023,13 @@
           </a:solidFill>
           <a:ln/>
         </p:spPr>
+        <p:txBody>
+          <a:bodyPr/>
+          <a:lstStyle/>
+          <a:p>
+            <a:endParaRPr lang="zh-CN" altLang="en-US"/>
+          </a:p>
+        </p:txBody>
       </p:sp>
       <p:sp>
         <p:nvSpPr>
@@ -6997,6 +7050,13 @@
           </a:solidFill>
           <a:ln/>
         </p:spPr>
+        <p:txBody>
+          <a:bodyPr/>
+          <a:lstStyle/>
+          <a:p>
+            <a:endParaRPr lang="zh-CN" altLang="en-US"/>
+          </a:p>
+        </p:txBody>
       </p:sp>
       <p:sp>
         <p:nvSpPr>
@@ -7019,7 +7079,7 @@
           <a:bodyPr wrap="square" lIns="0" tIns="0" rIns="0" bIns="0" rtlCol="0" anchor="ctr"/>
           <a:lstStyle/>
           <a:p>
-            <a:pPr indent="0" marL="0">
+            <a:pPr marL="0" indent="0">
               <a:buNone/>
             </a:pPr>
             <a:r>
@@ -7058,7 +7118,7 @@
           <a:bodyPr wrap="square" lIns="0" tIns="0" rIns="0" bIns="0" rtlCol="0" anchor="ctr"/>
           <a:lstStyle/>
           <a:p>
-            <a:pPr indent="0" marL="0">
+            <a:pPr marL="0" indent="0">
               <a:buNone/>
             </a:pPr>
             <a:r>
@@ -7097,7 +7157,7 @@
           <a:bodyPr wrap="square" lIns="0" tIns="0" rIns="0" bIns="0" rtlCol="0" anchor="ctr"/>
           <a:lstStyle/>
           <a:p>
-            <a:pPr indent="0" marL="0">
+            <a:pPr marL="0" indent="0">
               <a:buNone/>
             </a:pPr>
             <a:r>
@@ -7136,7 +7196,7 @@
           <a:bodyPr wrap="square" lIns="0" tIns="0" rIns="0" bIns="0" rtlCol="0" anchor="ctr"/>
           <a:lstStyle/>
           <a:p>
-            <a:pPr indent="0" marL="0">
+            <a:pPr marL="0" indent="0">
               <a:buNone/>
             </a:pPr>
             <a:r>
@@ -7175,7 +7235,7 @@
           <a:bodyPr wrap="square" lIns="0" tIns="0" rIns="0" bIns="0" rtlCol="0" anchor="ctr"/>
           <a:lstStyle/>
           <a:p>
-            <a:pPr indent="0" marL="0">
+            <a:pPr marL="0" indent="0">
               <a:buNone/>
             </a:pPr>
             <a:r>
@@ -7212,6 +7272,13 @@
           </a:solidFill>
           <a:ln/>
         </p:spPr>
+        <p:txBody>
+          <a:bodyPr/>
+          <a:lstStyle/>
+          <a:p>
+            <a:endParaRPr lang="zh-CN" altLang="en-US"/>
+          </a:p>
+        </p:txBody>
       </p:sp>
       <p:sp>
         <p:nvSpPr>
@@ -7232,6 +7299,13 @@
           </a:solidFill>
           <a:ln/>
         </p:spPr>
+        <p:txBody>
+          <a:bodyPr/>
+          <a:lstStyle/>
+          <a:p>
+            <a:endParaRPr lang="zh-CN" altLang="en-US"/>
+          </a:p>
+        </p:txBody>
       </p:sp>
       <p:sp>
         <p:nvSpPr>
@@ -7254,7 +7328,7 @@
           <a:bodyPr wrap="square" lIns="0" tIns="0" rIns="0" bIns="0" rtlCol="0" anchor="ctr"/>
           <a:lstStyle/>
           <a:p>
-            <a:pPr indent="0" marL="0">
+            <a:pPr marL="0" indent="0">
               <a:buNone/>
             </a:pPr>
             <a:r>
@@ -7293,7 +7367,7 @@
           <a:bodyPr wrap="square" lIns="0" tIns="0" rIns="0" bIns="0" rtlCol="0" anchor="ctr"/>
           <a:lstStyle/>
           <a:p>
-            <a:pPr indent="0" marL="0">
+            <a:pPr marL="0" indent="0">
               <a:buNone/>
             </a:pPr>
             <a:r>
@@ -7332,7 +7406,7 @@
           <a:bodyPr wrap="square" lIns="0" tIns="0" rIns="0" bIns="0" rtlCol="0" anchor="ctr"/>
           <a:lstStyle/>
           <a:p>
-            <a:pPr indent="0" marL="0">
+            <a:pPr marL="0" indent="0">
               <a:buNone/>
             </a:pPr>
             <a:r>
@@ -7371,7 +7445,7 @@
           <a:bodyPr wrap="square" lIns="0" tIns="0" rIns="0" bIns="0" rtlCol="0" anchor="ctr"/>
           <a:lstStyle/>
           <a:p>
-            <a:pPr indent="0" marL="0">
+            <a:pPr marL="0" indent="0">
               <a:buNone/>
             </a:pPr>
             <a:r>
@@ -7410,7 +7484,7 @@
           <a:bodyPr wrap="square" lIns="0" tIns="0" rIns="0" bIns="0" rtlCol="0" anchor="ctr"/>
           <a:lstStyle/>
           <a:p>
-            <a:pPr indent="0" marL="0">
+            <a:pPr marL="0" indent="0">
               <a:buNone/>
             </a:pPr>
             <a:r>
@@ -7447,6 +7521,13 @@
           </a:solidFill>
           <a:ln/>
         </p:spPr>
+        <p:txBody>
+          <a:bodyPr/>
+          <a:lstStyle/>
+          <a:p>
+            <a:endParaRPr lang="zh-CN" altLang="en-US"/>
+          </a:p>
+        </p:txBody>
       </p:sp>
       <p:sp>
         <p:nvSpPr>
@@ -7467,6 +7548,13 @@
           </a:solidFill>
           <a:ln/>
         </p:spPr>
+        <p:txBody>
+          <a:bodyPr/>
+          <a:lstStyle/>
+          <a:p>
+            <a:endParaRPr lang="zh-CN" altLang="en-US"/>
+          </a:p>
+        </p:txBody>
       </p:sp>
       <p:sp>
         <p:nvSpPr>
@@ -7489,7 +7577,7 @@
           <a:bodyPr wrap="square" lIns="0" tIns="0" rIns="0" bIns="0" rtlCol="0" anchor="ctr"/>
           <a:lstStyle/>
           <a:p>
-            <a:pPr indent="0" marL="0">
+            <a:pPr marL="0" indent="0">
               <a:buNone/>
             </a:pPr>
             <a:r>
@@ -7528,7 +7616,7 @@
           <a:bodyPr wrap="square" lIns="0" tIns="0" rIns="0" bIns="0" rtlCol="0" anchor="ctr"/>
           <a:lstStyle/>
           <a:p>
-            <a:pPr indent="0" marL="0">
+            <a:pPr marL="0" indent="0">
               <a:buNone/>
             </a:pPr>
             <a:r>
@@ -7567,7 +7655,7 @@
           <a:bodyPr wrap="square" lIns="0" tIns="0" rIns="0" bIns="0" rtlCol="0" anchor="ctr"/>
           <a:lstStyle/>
           <a:p>
-            <a:pPr indent="0" marL="0">
+            <a:pPr marL="0" indent="0">
               <a:buNone/>
             </a:pPr>
             <a:r>
@@ -7606,7 +7694,7 @@
           <a:bodyPr wrap="square" lIns="0" tIns="0" rIns="0" bIns="0" rtlCol="0" anchor="ctr"/>
           <a:lstStyle/>
           <a:p>
-            <a:pPr indent="0" marL="0">
+            <a:pPr marL="0" indent="0">
               <a:buNone/>
             </a:pPr>
             <a:r>
@@ -7645,7 +7733,7 @@
           <a:bodyPr wrap="square" lIns="0" tIns="0" rIns="0" bIns="0" rtlCol="0" anchor="ctr"/>
           <a:lstStyle/>
           <a:p>
-            <a:pPr indent="0" marL="0">
+            <a:pPr marL="0" indent="0">
               <a:buNone/>
             </a:pPr>
             <a:r>
@@ -7682,6 +7770,13 @@
           </a:solidFill>
           <a:ln/>
         </p:spPr>
+        <p:txBody>
+          <a:bodyPr/>
+          <a:lstStyle/>
+          <a:p>
+            <a:endParaRPr lang="zh-CN" altLang="en-US"/>
+          </a:p>
+        </p:txBody>
       </p:sp>
       <p:sp>
         <p:nvSpPr>
@@ -7702,6 +7797,13 @@
           </a:solidFill>
           <a:ln/>
         </p:spPr>
+        <p:txBody>
+          <a:bodyPr/>
+          <a:lstStyle/>
+          <a:p>
+            <a:endParaRPr lang="zh-CN" altLang="en-US"/>
+          </a:p>
+        </p:txBody>
       </p:sp>
       <p:sp>
         <p:nvSpPr>
@@ -7724,7 +7826,7 @@
           <a:bodyPr wrap="square" lIns="0" tIns="0" rIns="0" bIns="0" rtlCol="0" anchor="ctr"/>
           <a:lstStyle/>
           <a:p>
-            <a:pPr indent="0" marL="0">
+            <a:pPr marL="0" indent="0">
               <a:buNone/>
             </a:pPr>
             <a:r>
@@ -7763,7 +7865,7 @@
           <a:bodyPr wrap="square" lIns="0" tIns="0" rIns="0" bIns="0" rtlCol="0" anchor="ctr"/>
           <a:lstStyle/>
           <a:p>
-            <a:pPr indent="0" marL="0">
+            <a:pPr marL="0" indent="0">
               <a:buNone/>
             </a:pPr>
             <a:r>
@@ -7802,7 +7904,7 @@
           <a:bodyPr wrap="square" lIns="0" tIns="0" rIns="0" bIns="0" rtlCol="0" anchor="ctr"/>
           <a:lstStyle/>
           <a:p>
-            <a:pPr indent="0" marL="0">
+            <a:pPr marL="0" indent="0">
               <a:buNone/>
             </a:pPr>
             <a:r>
@@ -7841,7 +7943,7 @@
           <a:bodyPr wrap="square" lIns="0" tIns="0" rIns="0" bIns="0" rtlCol="0" anchor="ctr"/>
           <a:lstStyle/>
           <a:p>
-            <a:pPr indent="0" marL="0">
+            <a:pPr marL="0" indent="0">
               <a:buNone/>
             </a:pPr>
             <a:r>
@@ -7880,7 +7982,7 @@
           <a:bodyPr wrap="square" lIns="0" tIns="0" rIns="0" bIns="0" rtlCol="0" anchor="ctr"/>
           <a:lstStyle/>
           <a:p>
-            <a:pPr indent="0" marL="0">
+            <a:pPr marL="0" indent="0">
               <a:buNone/>
             </a:pPr>
             <a:r>
@@ -7917,6 +8019,13 @@
           </a:solidFill>
           <a:ln/>
         </p:spPr>
+        <p:txBody>
+          <a:bodyPr/>
+          <a:lstStyle/>
+          <a:p>
+            <a:endParaRPr lang="zh-CN" altLang="en-US"/>
+          </a:p>
+        </p:txBody>
       </p:sp>
       <p:sp>
         <p:nvSpPr>
@@ -7939,7 +8048,7 @@
           <a:bodyPr wrap="square" lIns="0" tIns="0" rIns="0" bIns="0" rtlCol="0" anchor="ctr"/>
           <a:lstStyle/>
           <a:p>
-            <a:pPr indent="0" marL="0">
+            <a:pPr marL="0" indent="0">
               <a:buNone/>
             </a:pPr>
             <a:r>
@@ -7979,6 +8088,13 @@
             <a:prstDash val="solid"/>
           </a:ln>
         </p:spPr>
+        <p:txBody>
+          <a:bodyPr/>
+          <a:lstStyle/>
+          <a:p>
+            <a:endParaRPr lang="zh-CN" altLang="en-US"/>
+          </a:p>
+        </p:txBody>
       </p:sp>
       <p:sp>
         <p:nvSpPr>
@@ -8001,7 +8117,7 @@
           <a:bodyPr wrap="square" lIns="0" tIns="0" rIns="0" bIns="0" rtlCol="0" anchor="ctr"/>
           <a:lstStyle/>
           <a:p>
-            <a:pPr indent="0" marL="0">
+            <a:pPr marL="0" indent="0">
               <a:buNone/>
             </a:pPr>
             <a:r>
@@ -8040,7 +8156,7 @@
           <a:bodyPr wrap="square" lIns="0" tIns="0" rIns="0" bIns="0" rtlCol="0" anchor="ctr"/>
           <a:lstStyle/>
           <a:p>
-            <a:pPr indent="0" marL="0">
+            <a:pPr marL="0" indent="0">
               <a:lnSpc>
                 <a:spcPct val="130000"/>
               </a:lnSpc>
@@ -8082,7 +8198,7 @@
           <a:bodyPr wrap="square" lIns="0" tIns="0" rIns="0" bIns="0" rtlCol="0" anchor="ctr"/>
           <a:lstStyle/>
           <a:p>
-            <a:pPr indent="0" marL="0">
+            <a:pPr marL="0" indent="0">
               <a:buNone/>
             </a:pPr>
             <a:r>
@@ -8121,7 +8237,7 @@
           <a:bodyPr wrap="square" lIns="0" tIns="0" rIns="0" bIns="0" rtlCol="0" anchor="ctr"/>
           <a:lstStyle/>
           <a:p>
-            <a:pPr indent="0" marL="0">
+            <a:pPr marL="0" indent="0">
               <a:lnSpc>
                 <a:spcPct val="130000"/>
               </a:lnSpc>
@@ -8163,11 +8279,11 @@
           <a:bodyPr wrap="square" rtlCol="0" anchor="ctr"/>
           <a:lstStyle/>
           <a:p>
-            <a:pPr indent="0" marL="0">
-              <a:buNone/>
-            </a:pPr>
-            <a:r>
-              <a:rPr lang="en-US" sz="650" spc="200" kern="0" dirty="0">
+            <a:pPr marL="0" indent="0">
+              <a:buNone/>
+            </a:pPr>
+            <a:r>
+              <a:rPr lang="en-US" sz="650" kern="0" spc="200" dirty="0">
                 <a:solidFill>
                   <a:srgbClr val="7E8D9E"/>
                 </a:solidFill>
@@ -8202,7 +8318,7 @@
           <a:bodyPr wrap="square" rtlCol="0" anchor="ctr"/>
           <a:lstStyle/>
           <a:p>
-            <a:pPr algn="r" indent="0" marL="0">
+            <a:pPr marL="0" indent="0" algn="r">
               <a:buNone/>
             </a:pPr>
             <a:r>
@@ -8242,6 +8358,13 @@
             <a:prstDash val="solid"/>
           </a:ln>
         </p:spPr>
+        <p:txBody>
+          <a:bodyPr/>
+          <a:lstStyle/>
+          <a:p>
+            <a:endParaRPr lang="zh-CN" altLang="en-US"/>
+          </a:p>
+        </p:txBody>
       </p:sp>
     </p:spTree>
   </p:cSld>
@@ -8259,6 +8382,7 @@
         <a:solidFill>
           <a:srgbClr val="060E18"/>
         </a:solidFill>
+        <a:effectLst/>
       </p:bgPr>
     </p:bg>
     <p:spTree>
@@ -8296,7 +8420,7 @@
           <a:bodyPr wrap="square" lIns="0" tIns="0" rIns="0" bIns="0" rtlCol="0" anchor="ctr"/>
           <a:lstStyle/>
           <a:p>
-            <a:pPr indent="0" marL="0">
+            <a:pPr marL="0" indent="0">
               <a:buNone/>
             </a:pPr>
             <a:r>
@@ -8336,6 +8460,13 @@
             <a:prstDash val="solid"/>
           </a:ln>
         </p:spPr>
+        <p:txBody>
+          <a:bodyPr/>
+          <a:lstStyle/>
+          <a:p>
+            <a:endParaRPr lang="zh-CN" altLang="en-US"/>
+          </a:p>
+        </p:txBody>
       </p:sp>
       <p:sp>
         <p:nvSpPr>
@@ -8358,7 +8489,7 @@
           <a:bodyPr wrap="square" lIns="0" tIns="0" rIns="0" bIns="0" rtlCol="0" anchor="ctr"/>
           <a:lstStyle/>
           <a:p>
-            <a:pPr indent="0" marL="0">
+            <a:pPr marL="0" indent="0">
               <a:buNone/>
             </a:pPr>
             <a:r>
@@ -8395,6 +8526,13 @@
           </a:solidFill>
           <a:ln/>
         </p:spPr>
+        <p:txBody>
+          <a:bodyPr/>
+          <a:lstStyle/>
+          <a:p>
+            <a:endParaRPr lang="zh-CN" altLang="en-US"/>
+          </a:p>
+        </p:txBody>
       </p:sp>
       <p:sp>
         <p:nvSpPr>
@@ -8417,7 +8555,7 @@
           <a:bodyPr wrap="square" lIns="0" tIns="0" rIns="0" bIns="0" rtlCol="0" anchor="ctr"/>
           <a:lstStyle/>
           <a:p>
-            <a:pPr indent="0" marL="0">
+            <a:pPr marL="0" indent="0">
               <a:buNone/>
             </a:pPr>
             <a:r>
@@ -8456,7 +8594,7 @@
           <a:bodyPr wrap="square" lIns="0" tIns="0" rIns="0" bIns="0" rtlCol="0" anchor="ctr"/>
           <a:lstStyle/>
           <a:p>
-            <a:pPr indent="0" marL="0">
+            <a:pPr marL="0" indent="0">
               <a:buNone/>
             </a:pPr>
             <a:r>
@@ -8495,7 +8633,7 @@
           <a:bodyPr wrap="square" lIns="0" tIns="0" rIns="0" bIns="0" rtlCol="0" anchor="ctr"/>
           <a:lstStyle/>
           <a:p>
-            <a:pPr indent="0" marL="0">
+            <a:pPr marL="0" indent="0">
               <a:buNone/>
             </a:pPr>
             <a:r>
@@ -8534,7 +8672,7 @@
           <a:bodyPr wrap="square" lIns="0" tIns="0" rIns="0" bIns="0" rtlCol="0" anchor="ctr"/>
           <a:lstStyle/>
           <a:p>
-            <a:pPr indent="0" marL="0">
+            <a:pPr marL="0" indent="0">
               <a:buNone/>
             </a:pPr>
             <a:r>
@@ -8573,7 +8711,7 @@
           <a:bodyPr wrap="square" lIns="0" tIns="0" rIns="0" bIns="0" rtlCol="0" anchor="ctr"/>
           <a:lstStyle/>
           <a:p>
-            <a:pPr indent="0" marL="0">
+            <a:pPr marL="0" indent="0">
               <a:buNone/>
             </a:pPr>
             <a:r>
@@ -8610,6 +8748,13 @@
           </a:solidFill>
           <a:ln/>
         </p:spPr>
+        <p:txBody>
+          <a:bodyPr/>
+          <a:lstStyle/>
+          <a:p>
+            <a:endParaRPr lang="zh-CN" altLang="en-US"/>
+          </a:p>
+        </p:txBody>
       </p:sp>
       <p:sp>
         <p:nvSpPr>
@@ -8632,7 +8777,7 @@
           <a:bodyPr wrap="square" lIns="0" tIns="0" rIns="0" bIns="0" rtlCol="0" anchor="ctr"/>
           <a:lstStyle/>
           <a:p>
-            <a:pPr indent="0" marL="0">
+            <a:pPr marL="0" indent="0">
               <a:buNone/>
             </a:pPr>
             <a:r>
@@ -8671,7 +8816,7 @@
           <a:bodyPr wrap="square" lIns="0" tIns="0" rIns="0" bIns="0" rtlCol="0" anchor="ctr"/>
           <a:lstStyle/>
           <a:p>
-            <a:pPr indent="0" marL="0">
+            <a:pPr marL="0" indent="0">
               <a:buNone/>
             </a:pPr>
             <a:r>
@@ -8710,7 +8855,7 @@
           <a:bodyPr wrap="square" lIns="0" tIns="0" rIns="0" bIns="0" rtlCol="0" anchor="ctr"/>
           <a:lstStyle/>
           <a:p>
-            <a:pPr indent="0" marL="0">
+            <a:pPr marL="0" indent="0">
               <a:buNone/>
             </a:pPr>
             <a:r>
@@ -8749,7 +8894,7 @@
           <a:bodyPr wrap="square" lIns="0" tIns="0" rIns="0" bIns="0" rtlCol="0" anchor="ctr"/>
           <a:lstStyle/>
           <a:p>
-            <a:pPr indent="0" marL="0">
+            <a:pPr marL="0" indent="0">
               <a:buNone/>
             </a:pPr>
             <a:r>
@@ -8786,6 +8931,13 @@
           </a:solidFill>
           <a:ln/>
         </p:spPr>
+        <p:txBody>
+          <a:bodyPr/>
+          <a:lstStyle/>
+          <a:p>
+            <a:endParaRPr lang="zh-CN" altLang="en-US"/>
+          </a:p>
+        </p:txBody>
       </p:sp>
       <p:sp>
         <p:nvSpPr>
@@ -8808,7 +8960,7 @@
           <a:bodyPr wrap="square" lIns="0" tIns="0" rIns="0" bIns="0" rtlCol="0" anchor="ctr"/>
           <a:lstStyle/>
           <a:p>
-            <a:pPr indent="0" marL="0">
+            <a:pPr marL="0" indent="0">
               <a:buNone/>
             </a:pPr>
             <a:r>
@@ -8845,6 +8997,13 @@
           </a:solidFill>
           <a:ln/>
         </p:spPr>
+        <p:txBody>
+          <a:bodyPr/>
+          <a:lstStyle/>
+          <a:p>
+            <a:endParaRPr lang="zh-CN" altLang="en-US"/>
+          </a:p>
+        </p:txBody>
       </p:sp>
       <p:sp>
         <p:nvSpPr>
@@ -8867,7 +9026,7 @@
           <a:bodyPr wrap="square" lIns="0" tIns="0" rIns="0" bIns="0" rtlCol="0" anchor="ctr"/>
           <a:lstStyle/>
           <a:p>
-            <a:pPr indent="0" marL="0">
+            <a:pPr marL="0" indent="0">
               <a:buNone/>
             </a:pPr>
             <a:r>
@@ -8906,7 +9065,7 @@
           <a:bodyPr wrap="square" lIns="0" tIns="0" rIns="0" bIns="0" rtlCol="0" anchor="ctr"/>
           <a:lstStyle/>
           <a:p>
-            <a:pPr indent="0" marL="0">
+            <a:pPr marL="0" indent="0">
               <a:buNone/>
             </a:pPr>
             <a:r>
@@ -8945,7 +9104,7 @@
           <a:bodyPr wrap="square" lIns="0" tIns="0" rIns="0" bIns="0" rtlCol="0" anchor="ctr"/>
           <a:lstStyle/>
           <a:p>
-            <a:pPr indent="0" marL="0">
+            <a:pPr marL="0" indent="0">
               <a:buNone/>
             </a:pPr>
             <a:r>
@@ -8984,7 +9143,7 @@
           <a:bodyPr wrap="square" lIns="0" tIns="0" rIns="0" bIns="0" rtlCol="0" anchor="ctr"/>
           <a:lstStyle/>
           <a:p>
-            <a:pPr indent="0" marL="0">
+            <a:pPr marL="0" indent="0">
               <a:buNone/>
             </a:pPr>
             <a:r>
@@ -9021,6 +9180,13 @@
           </a:solidFill>
           <a:ln/>
         </p:spPr>
+        <p:txBody>
+          <a:bodyPr/>
+          <a:lstStyle/>
+          <a:p>
+            <a:endParaRPr lang="zh-CN" altLang="en-US"/>
+          </a:p>
+        </p:txBody>
       </p:sp>
       <p:sp>
         <p:nvSpPr>
@@ -9043,7 +9209,7 @@
           <a:bodyPr wrap="square" lIns="0" tIns="0" rIns="0" bIns="0" rtlCol="0" anchor="ctr"/>
           <a:lstStyle/>
           <a:p>
-            <a:pPr indent="0" marL="0">
+            <a:pPr marL="0" indent="0">
               <a:buNone/>
             </a:pPr>
             <a:r>
@@ -9080,6 +9246,13 @@
           </a:solidFill>
           <a:ln/>
         </p:spPr>
+        <p:txBody>
+          <a:bodyPr/>
+          <a:lstStyle/>
+          <a:p>
+            <a:endParaRPr lang="zh-CN" altLang="en-US"/>
+          </a:p>
+        </p:txBody>
       </p:sp>
       <p:sp>
         <p:nvSpPr>
@@ -9102,7 +9275,7 @@
           <a:bodyPr wrap="square" lIns="0" tIns="0" rIns="0" bIns="0" rtlCol="0" anchor="ctr"/>
           <a:lstStyle/>
           <a:p>
-            <a:pPr indent="0" marL="0">
+            <a:pPr marL="0" indent="0">
               <a:buNone/>
             </a:pPr>
             <a:r>
@@ -9141,7 +9314,7 @@
           <a:bodyPr wrap="square" lIns="0" tIns="0" rIns="0" bIns="0" rtlCol="0" anchor="ctr"/>
           <a:lstStyle/>
           <a:p>
-            <a:pPr indent="0" marL="0">
+            <a:pPr marL="0" indent="0">
               <a:buNone/>
             </a:pPr>
             <a:r>
@@ -9180,7 +9353,7 @@
           <a:bodyPr wrap="square" lIns="0" tIns="0" rIns="0" bIns="0" rtlCol="0" anchor="ctr"/>
           <a:lstStyle/>
           <a:p>
-            <a:pPr indent="0" marL="0">
+            <a:pPr marL="0" indent="0">
               <a:buNone/>
             </a:pPr>
             <a:r>
@@ -9219,7 +9392,7 @@
           <a:bodyPr wrap="square" lIns="0" tIns="0" rIns="0" bIns="0" rtlCol="0" anchor="ctr"/>
           <a:lstStyle/>
           <a:p>
-            <a:pPr indent="0" marL="0">
+            <a:pPr marL="0" indent="0">
               <a:buNone/>
             </a:pPr>
             <a:r>
@@ -9256,6 +9429,13 @@
           </a:solidFill>
           <a:ln/>
         </p:spPr>
+        <p:txBody>
+          <a:bodyPr/>
+          <a:lstStyle/>
+          <a:p>
+            <a:endParaRPr lang="zh-CN" altLang="en-US"/>
+          </a:p>
+        </p:txBody>
       </p:sp>
       <p:sp>
         <p:nvSpPr>
@@ -9278,7 +9458,7 @@
           <a:bodyPr wrap="square" lIns="0" tIns="0" rIns="0" bIns="0" rtlCol="0" anchor="ctr"/>
           <a:lstStyle/>
           <a:p>
-            <a:pPr indent="0" marL="0">
+            <a:pPr marL="0" indent="0">
               <a:buNone/>
             </a:pPr>
             <a:r>
@@ -9315,6 +9495,13 @@
           </a:solidFill>
           <a:ln/>
         </p:spPr>
+        <p:txBody>
+          <a:bodyPr/>
+          <a:lstStyle/>
+          <a:p>
+            <a:endParaRPr lang="zh-CN" altLang="en-US"/>
+          </a:p>
+        </p:txBody>
       </p:sp>
       <p:sp>
         <p:nvSpPr>
@@ -9337,7 +9524,7 @@
           <a:bodyPr wrap="square" lIns="0" tIns="0" rIns="0" bIns="0" rtlCol="0" anchor="ctr"/>
           <a:lstStyle/>
           <a:p>
-            <a:pPr indent="0" marL="0">
+            <a:pPr marL="0" indent="0">
               <a:buNone/>
             </a:pPr>
             <a:r>
@@ -9376,7 +9563,7 @@
           <a:bodyPr wrap="square" lIns="0" tIns="0" rIns="0" bIns="0" rtlCol="0" anchor="ctr"/>
           <a:lstStyle/>
           <a:p>
-            <a:pPr indent="0" marL="0">
+            <a:pPr marL="0" indent="0">
               <a:buNone/>
             </a:pPr>
             <a:r>
@@ -9415,7 +9602,7 @@
           <a:bodyPr wrap="square" lIns="0" tIns="0" rIns="0" bIns="0" rtlCol="0" anchor="ctr"/>
           <a:lstStyle/>
           <a:p>
-            <a:pPr indent="0" marL="0">
+            <a:pPr marL="0" indent="0">
               <a:buNone/>
             </a:pPr>
             <a:r>
@@ -9454,7 +9641,7 @@
           <a:bodyPr wrap="square" lIns="0" tIns="0" rIns="0" bIns="0" rtlCol="0" anchor="ctr"/>
           <a:lstStyle/>
           <a:p>
-            <a:pPr indent="0" marL="0">
+            <a:pPr marL="0" indent="0">
               <a:buNone/>
             </a:pPr>
             <a:r>
@@ -9491,6 +9678,13 @@
           </a:solidFill>
           <a:ln/>
         </p:spPr>
+        <p:txBody>
+          <a:bodyPr/>
+          <a:lstStyle/>
+          <a:p>
+            <a:endParaRPr lang="zh-CN" altLang="en-US"/>
+          </a:p>
+        </p:txBody>
       </p:sp>
       <p:sp>
         <p:nvSpPr>
@@ -9513,7 +9707,7 @@
           <a:bodyPr wrap="square" lIns="0" tIns="0" rIns="0" bIns="0" rtlCol="0" anchor="ctr"/>
           <a:lstStyle/>
           <a:p>
-            <a:pPr indent="0" marL="0">
+            <a:pPr marL="0" indent="0">
               <a:buNone/>
             </a:pPr>
             <a:r>
@@ -9550,6 +9744,13 @@
           </a:solidFill>
           <a:ln/>
         </p:spPr>
+        <p:txBody>
+          <a:bodyPr/>
+          <a:lstStyle/>
+          <a:p>
+            <a:endParaRPr lang="zh-CN" altLang="en-US"/>
+          </a:p>
+        </p:txBody>
       </p:sp>
       <p:sp>
         <p:nvSpPr>
@@ -9572,7 +9773,7 @@
           <a:bodyPr wrap="square" lIns="0" tIns="0" rIns="0" bIns="0" rtlCol="0" anchor="ctr"/>
           <a:lstStyle/>
           <a:p>
-            <a:pPr indent="0" marL="0">
+            <a:pPr marL="0" indent="0">
               <a:buNone/>
             </a:pPr>
             <a:r>
@@ -9611,7 +9812,7 @@
           <a:bodyPr wrap="square" lIns="0" tIns="0" rIns="0" bIns="0" rtlCol="0" anchor="ctr"/>
           <a:lstStyle/>
           <a:p>
-            <a:pPr indent="0" marL="0">
+            <a:pPr marL="0" indent="0">
               <a:buNone/>
             </a:pPr>
             <a:r>
@@ -9650,7 +9851,7 @@
           <a:bodyPr wrap="square" lIns="0" tIns="0" rIns="0" bIns="0" rtlCol="0" anchor="ctr"/>
           <a:lstStyle/>
           <a:p>
-            <a:pPr indent="0" marL="0">
+            <a:pPr marL="0" indent="0">
               <a:buNone/>
             </a:pPr>
             <a:r>
@@ -9689,7 +9890,7 @@
           <a:bodyPr wrap="square" lIns="0" tIns="0" rIns="0" bIns="0" rtlCol="0" anchor="ctr"/>
           <a:lstStyle/>
           <a:p>
-            <a:pPr indent="0" marL="0">
+            <a:pPr marL="0" indent="0">
               <a:buNone/>
             </a:pPr>
             <a:r>
@@ -9726,6 +9927,13 @@
           </a:solidFill>
           <a:ln/>
         </p:spPr>
+        <p:txBody>
+          <a:bodyPr/>
+          <a:lstStyle/>
+          <a:p>
+            <a:endParaRPr lang="zh-CN" altLang="en-US"/>
+          </a:p>
+        </p:txBody>
       </p:sp>
       <p:sp>
         <p:nvSpPr>
@@ -9748,7 +9956,7 @@
           <a:bodyPr wrap="square" lIns="0" tIns="0" rIns="0" bIns="0" rtlCol="0" anchor="ctr"/>
           <a:lstStyle/>
           <a:p>
-            <a:pPr indent="0" marL="0">
+            <a:pPr marL="0" indent="0">
               <a:buNone/>
             </a:pPr>
             <a:r>
@@ -9785,6 +9993,13 @@
           </a:solidFill>
           <a:ln/>
         </p:spPr>
+        <p:txBody>
+          <a:bodyPr/>
+          <a:lstStyle/>
+          <a:p>
+            <a:endParaRPr lang="zh-CN" altLang="en-US"/>
+          </a:p>
+        </p:txBody>
       </p:sp>
       <p:sp>
         <p:nvSpPr>
@@ -9807,7 +10022,7 @@
           <a:bodyPr wrap="square" lIns="0" tIns="0" rIns="0" bIns="0" rtlCol="0" anchor="ctr"/>
           <a:lstStyle/>
           <a:p>
-            <a:pPr indent="0" marL="0">
+            <a:pPr marL="0" indent="0">
               <a:buNone/>
             </a:pPr>
             <a:r>
@@ -9846,7 +10061,7 @@
           <a:bodyPr wrap="square" lIns="0" tIns="0" rIns="0" bIns="0" rtlCol="0" anchor="ctr"/>
           <a:lstStyle/>
           <a:p>
-            <a:pPr indent="0" marL="0">
+            <a:pPr marL="0" indent="0">
               <a:buNone/>
             </a:pPr>
             <a:r>
@@ -9885,7 +10100,7 @@
           <a:bodyPr wrap="square" lIns="0" tIns="0" rIns="0" bIns="0" rtlCol="0" anchor="ctr"/>
           <a:lstStyle/>
           <a:p>
-            <a:pPr indent="0" marL="0">
+            <a:pPr marL="0" indent="0">
               <a:buNone/>
             </a:pPr>
             <a:r>
@@ -9924,7 +10139,7 @@
           <a:bodyPr wrap="square" lIns="0" tIns="0" rIns="0" bIns="0" rtlCol="0" anchor="ctr"/>
           <a:lstStyle/>
           <a:p>
-            <a:pPr indent="0" marL="0">
+            <a:pPr marL="0" indent="0">
               <a:buNone/>
             </a:pPr>
             <a:r>
@@ -9961,6 +10176,13 @@
           </a:solidFill>
           <a:ln/>
         </p:spPr>
+        <p:txBody>
+          <a:bodyPr/>
+          <a:lstStyle/>
+          <a:p>
+            <a:endParaRPr lang="zh-CN" altLang="en-US"/>
+          </a:p>
+        </p:txBody>
       </p:sp>
       <p:sp>
         <p:nvSpPr>
@@ -9983,7 +10205,7 @@
           <a:bodyPr wrap="square" lIns="0" tIns="0" rIns="0" bIns="0" rtlCol="0" anchor="ctr"/>
           <a:lstStyle/>
           <a:p>
-            <a:pPr indent="0" marL="0">
+            <a:pPr marL="0" indent="0">
               <a:buNone/>
             </a:pPr>
             <a:r>
@@ -10022,11 +10244,11 @@
           <a:bodyPr wrap="square" rtlCol="0" anchor="ctr"/>
           <a:lstStyle/>
           <a:p>
-            <a:pPr indent="0" marL="0">
-              <a:buNone/>
-            </a:pPr>
-            <a:r>
-              <a:rPr lang="en-US" sz="650" spc="200" kern="0" dirty="0">
+            <a:pPr marL="0" indent="0">
+              <a:buNone/>
+            </a:pPr>
+            <a:r>
+              <a:rPr lang="en-US" sz="650" kern="0" spc="200" dirty="0">
                 <a:solidFill>
                   <a:srgbClr val="7E8D9E"/>
                 </a:solidFill>
@@ -10061,7 +10283,7 @@
           <a:bodyPr wrap="square" rtlCol="0" anchor="ctr"/>
           <a:lstStyle/>
           <a:p>
-            <a:pPr algn="r" indent="0" marL="0">
+            <a:pPr marL="0" indent="0" algn="r">
               <a:buNone/>
             </a:pPr>
             <a:r>
@@ -10101,6 +10323,13 @@
             <a:prstDash val="solid"/>
           </a:ln>
         </p:spPr>
+        <p:txBody>
+          <a:bodyPr/>
+          <a:lstStyle/>
+          <a:p>
+            <a:endParaRPr lang="zh-CN" altLang="en-US"/>
+          </a:p>
+        </p:txBody>
       </p:sp>
     </p:spTree>
   </p:cSld>
@@ -10118,6 +10347,7 @@
         <a:solidFill>
           <a:srgbClr val="060E18"/>
         </a:solidFill>
+        <a:effectLst/>
       </p:bgPr>
     </p:bg>
     <p:spTree>
@@ -10155,7 +10385,7 @@
           <a:bodyPr wrap="square" lIns="0" tIns="0" rIns="0" bIns="0" rtlCol="0" anchor="ctr"/>
           <a:lstStyle/>
           <a:p>
-            <a:pPr indent="0" marL="0">
+            <a:pPr marL="0" indent="0">
               <a:buNone/>
             </a:pPr>
             <a:r>
@@ -10195,6 +10425,13 @@
             <a:prstDash val="solid"/>
           </a:ln>
         </p:spPr>
+        <p:txBody>
+          <a:bodyPr/>
+          <a:lstStyle/>
+          <a:p>
+            <a:endParaRPr lang="zh-CN" altLang="en-US"/>
+          </a:p>
+        </p:txBody>
       </p:sp>
       <p:sp>
         <p:nvSpPr>
@@ -10217,7 +10454,7 @@
           <a:bodyPr wrap="square" lIns="0" tIns="0" rIns="0" bIns="0" rtlCol="0" anchor="ctr"/>
           <a:lstStyle/>
           <a:p>
-            <a:pPr indent="0" marL="0">
+            <a:pPr marL="0" indent="0">
               <a:buNone/>
             </a:pPr>
             <a:r>
@@ -10254,6 +10491,13 @@
           </a:solidFill>
           <a:ln/>
         </p:spPr>
+        <p:txBody>
+          <a:bodyPr/>
+          <a:lstStyle/>
+          <a:p>
+            <a:endParaRPr lang="zh-CN" altLang="en-US"/>
+          </a:p>
+        </p:txBody>
       </p:sp>
       <p:sp>
         <p:nvSpPr>
@@ -10274,6 +10518,13 @@
           </a:solidFill>
           <a:ln/>
         </p:spPr>
+        <p:txBody>
+          <a:bodyPr/>
+          <a:lstStyle/>
+          <a:p>
+            <a:endParaRPr lang="zh-CN" altLang="en-US"/>
+          </a:p>
+        </p:txBody>
       </p:sp>
       <p:sp>
         <p:nvSpPr>
@@ -10296,7 +10547,7 @@
           <a:bodyPr wrap="square" lIns="0" tIns="0" rIns="0" bIns="0" rtlCol="0" anchor="ctr"/>
           <a:lstStyle/>
           <a:p>
-            <a:pPr indent="0" marL="0">
+            <a:pPr marL="0" indent="0">
               <a:buNone/>
             </a:pPr>
             <a:r>
@@ -10335,7 +10586,7 @@
           <a:bodyPr wrap="square" lIns="0" tIns="0" rIns="0" bIns="0" rtlCol="0" anchor="ctr"/>
           <a:lstStyle/>
           <a:p>
-            <a:pPr indent="0" marL="0">
+            <a:pPr marL="0" indent="0">
               <a:buNone/>
             </a:pPr>
             <a:r>
@@ -10372,6 +10623,13 @@
           </a:solidFill>
           <a:ln/>
         </p:spPr>
+        <p:txBody>
+          <a:bodyPr/>
+          <a:lstStyle/>
+          <a:p>
+            <a:endParaRPr lang="zh-CN" altLang="en-US"/>
+          </a:p>
+        </p:txBody>
       </p:sp>
       <p:sp>
         <p:nvSpPr>
@@ -10394,7 +10652,7 @@
           <a:bodyPr wrap="square" lIns="0" tIns="0" rIns="0" bIns="0" rtlCol="0" anchor="ctr"/>
           <a:lstStyle/>
           <a:p>
-            <a:pPr indent="0" marL="0">
+            <a:pPr marL="0" indent="0">
               <a:buNone/>
             </a:pPr>
             <a:r>
@@ -10433,7 +10691,7 @@
           <a:bodyPr wrap="square" lIns="0" tIns="0" rIns="0" bIns="0" rtlCol="0" anchor="ctr"/>
           <a:lstStyle/>
           <a:p>
-            <a:pPr algn="ctr" indent="0" marL="0">
+            <a:pPr marL="0" indent="0" algn="ctr">
               <a:buNone/>
             </a:pPr>
             <a:r>
@@ -10472,7 +10730,7 @@
           <a:bodyPr wrap="square" lIns="0" tIns="0" rIns="0" bIns="0" rtlCol="0" anchor="ctr"/>
           <a:lstStyle/>
           <a:p>
-            <a:pPr algn="ctr" indent="0" marL="0">
+            <a:pPr marL="0" indent="0" algn="ctr">
               <a:buNone/>
             </a:pPr>
             <a:r>
@@ -10511,7 +10769,7 @@
           <a:bodyPr wrap="square" lIns="0" tIns="0" rIns="0" bIns="0" rtlCol="0" anchor="ctr"/>
           <a:lstStyle/>
           <a:p>
-            <a:pPr indent="0" marL="0">
+            <a:pPr marL="0" indent="0">
               <a:buNone/>
             </a:pPr>
             <a:r>
@@ -10550,7 +10808,7 @@
           <a:bodyPr wrap="square" lIns="0" tIns="0" rIns="0" bIns="0" rtlCol="0" anchor="ctr"/>
           <a:lstStyle/>
           <a:p>
-            <a:pPr indent="0" marL="0">
+            <a:pPr marL="0" indent="0">
               <a:buNone/>
             </a:pPr>
             <a:r>
@@ -10589,7 +10847,7 @@
           <a:bodyPr wrap="square" lIns="0" tIns="0" rIns="0" bIns="0" rtlCol="0" anchor="ctr"/>
           <a:lstStyle/>
           <a:p>
-            <a:pPr algn="ctr" indent="0" marL="0">
+            <a:pPr marL="0" indent="0" algn="ctr">
               <a:buNone/>
             </a:pPr>
             <a:r>
@@ -10628,7 +10886,7 @@
           <a:bodyPr wrap="square" lIns="0" tIns="0" rIns="0" bIns="0" rtlCol="0" anchor="ctr"/>
           <a:lstStyle/>
           <a:p>
-            <a:pPr algn="ctr" indent="0" marL="0">
+            <a:pPr marL="0" indent="0" algn="ctr">
               <a:buNone/>
             </a:pPr>
             <a:r>
@@ -10667,7 +10925,7 @@
           <a:bodyPr wrap="square" lIns="0" tIns="0" rIns="0" bIns="0" rtlCol="0" anchor="ctr"/>
           <a:lstStyle/>
           <a:p>
-            <a:pPr indent="0" marL="0">
+            <a:pPr marL="0" indent="0">
               <a:buNone/>
             </a:pPr>
             <a:r>
@@ -10706,7 +10964,7 @@
           <a:bodyPr wrap="square" lIns="0" tIns="0" rIns="0" bIns="0" rtlCol="0" anchor="ctr"/>
           <a:lstStyle/>
           <a:p>
-            <a:pPr indent="0" marL="0">
+            <a:pPr marL="0" indent="0">
               <a:buNone/>
             </a:pPr>
             <a:r>
@@ -10745,7 +11003,7 @@
           <a:bodyPr wrap="square" lIns="0" tIns="0" rIns="0" bIns="0" rtlCol="0" anchor="ctr"/>
           <a:lstStyle/>
           <a:p>
-            <a:pPr algn="ctr" indent="0" marL="0">
+            <a:pPr marL="0" indent="0" algn="ctr">
               <a:buNone/>
             </a:pPr>
             <a:r>
@@ -10784,7 +11042,7 @@
           <a:bodyPr wrap="square" lIns="0" tIns="0" rIns="0" bIns="0" rtlCol="0" anchor="ctr"/>
           <a:lstStyle/>
           <a:p>
-            <a:pPr algn="ctr" indent="0" marL="0">
+            <a:pPr marL="0" indent="0" algn="ctr">
               <a:buNone/>
             </a:pPr>
             <a:r>
@@ -10823,7 +11081,7 @@
           <a:bodyPr wrap="square" lIns="0" tIns="0" rIns="0" bIns="0" rtlCol="0" anchor="ctr"/>
           <a:lstStyle/>
           <a:p>
-            <a:pPr indent="0" marL="0">
+            <a:pPr marL="0" indent="0">
               <a:buNone/>
             </a:pPr>
             <a:r>
@@ -10862,7 +11120,7 @@
           <a:bodyPr wrap="square" lIns="0" tIns="0" rIns="0" bIns="0" rtlCol="0" anchor="ctr"/>
           <a:lstStyle/>
           <a:p>
-            <a:pPr indent="0" marL="0">
+            <a:pPr marL="0" indent="0">
               <a:buNone/>
             </a:pPr>
             <a:r>
@@ -10901,7 +11159,7 @@
           <a:bodyPr wrap="square" lIns="0" tIns="0" rIns="0" bIns="0" rtlCol="0" anchor="ctr"/>
           <a:lstStyle/>
           <a:p>
-            <a:pPr algn="ctr" indent="0" marL="0">
+            <a:pPr marL="0" indent="0" algn="ctr">
               <a:buNone/>
             </a:pPr>
             <a:r>
@@ -10940,7 +11198,7 @@
           <a:bodyPr wrap="square" lIns="0" tIns="0" rIns="0" bIns="0" rtlCol="0" anchor="ctr"/>
           <a:lstStyle/>
           <a:p>
-            <a:pPr algn="ctr" indent="0" marL="0">
+            <a:pPr marL="0" indent="0" algn="ctr">
               <a:buNone/>
             </a:pPr>
             <a:r>
@@ -10979,7 +11237,7 @@
           <a:bodyPr wrap="square" lIns="0" tIns="0" rIns="0" bIns="0" rtlCol="0" anchor="ctr"/>
           <a:lstStyle/>
           <a:p>
-            <a:pPr indent="0" marL="0">
+            <a:pPr marL="0" indent="0">
               <a:buNone/>
             </a:pPr>
             <a:r>
@@ -11018,7 +11276,7 @@
           <a:bodyPr wrap="square" lIns="0" tIns="0" rIns="0" bIns="0" rtlCol="0" anchor="ctr"/>
           <a:lstStyle/>
           <a:p>
-            <a:pPr indent="0" marL="0">
+            <a:pPr marL="0" indent="0">
               <a:buNone/>
             </a:pPr>
             <a:r>
@@ -11057,7 +11315,7 @@
           <a:bodyPr wrap="square" lIns="0" tIns="0" rIns="0" bIns="0" rtlCol="0" anchor="ctr"/>
           <a:lstStyle/>
           <a:p>
-            <a:pPr algn="ctr" indent="0" marL="0">
+            <a:pPr marL="0" indent="0" algn="ctr">
               <a:buNone/>
             </a:pPr>
             <a:r>
@@ -11096,7 +11354,7 @@
           <a:bodyPr wrap="square" lIns="0" tIns="0" rIns="0" bIns="0" rtlCol="0" anchor="ctr"/>
           <a:lstStyle/>
           <a:p>
-            <a:pPr algn="ctr" indent="0" marL="0">
+            <a:pPr marL="0" indent="0" algn="ctr">
               <a:buNone/>
             </a:pPr>
             <a:r>
@@ -11135,7 +11393,7 @@
           <a:bodyPr wrap="square" lIns="0" tIns="0" rIns="0" bIns="0" rtlCol="0" anchor="ctr"/>
           <a:lstStyle/>
           <a:p>
-            <a:pPr indent="0" marL="0">
+            <a:pPr marL="0" indent="0">
               <a:buNone/>
             </a:pPr>
             <a:r>
@@ -11172,6 +11430,13 @@
           </a:solidFill>
           <a:ln/>
         </p:spPr>
+        <p:txBody>
+          <a:bodyPr/>
+          <a:lstStyle/>
+          <a:p>
+            <a:endParaRPr lang="zh-CN" altLang="en-US"/>
+          </a:p>
+        </p:txBody>
       </p:sp>
       <p:sp>
         <p:nvSpPr>
@@ -11192,6 +11457,13 @@
           </a:solidFill>
           <a:ln/>
         </p:spPr>
+        <p:txBody>
+          <a:bodyPr/>
+          <a:lstStyle/>
+          <a:p>
+            <a:endParaRPr lang="zh-CN" altLang="en-US"/>
+          </a:p>
+        </p:txBody>
       </p:sp>
       <p:sp>
         <p:nvSpPr>
@@ -11214,7 +11486,7 @@
           <a:bodyPr wrap="square" lIns="0" tIns="0" rIns="0" bIns="0" rtlCol="0" anchor="ctr"/>
           <a:lstStyle/>
           <a:p>
-            <a:pPr indent="0" marL="0">
+            <a:pPr marL="0" indent="0">
               <a:buNone/>
             </a:pPr>
             <a:r>
@@ -11253,7 +11525,7 @@
           <a:bodyPr wrap="square" lIns="0" tIns="0" rIns="0" bIns="0" rtlCol="0" anchor="ctr"/>
           <a:lstStyle/>
           <a:p>
-            <a:pPr indent="0" marL="0">
+            <a:pPr marL="0" indent="0">
               <a:buNone/>
             </a:pPr>
             <a:r>
@@ -11292,7 +11564,7 @@
           <a:bodyPr wrap="square" lIns="0" tIns="0" rIns="0" bIns="0" rtlCol="0" anchor="ctr"/>
           <a:lstStyle/>
           <a:p>
-            <a:pPr indent="0" marL="0">
+            <a:pPr marL="0" indent="0">
               <a:lnSpc>
                 <a:spcPct val="140000"/>
               </a:lnSpc>
@@ -11334,11 +11606,11 @@
           <a:bodyPr wrap="square" lIns="0" tIns="0" rIns="0" bIns="0" rtlCol="0" anchor="ctr"/>
           <a:lstStyle/>
           <a:p>
-            <a:pPr indent="0" marL="0">
-              <a:buNone/>
-            </a:pPr>
-            <a:r>
-              <a:rPr lang="en-US" sz="650" spc="250" kern="0" dirty="0">
+            <a:pPr marL="0" indent="0">
+              <a:buNone/>
+            </a:pPr>
+            <a:r>
+              <a:rPr lang="en-US" sz="650" kern="0" spc="250" dirty="0">
                 <a:solidFill>
                   <a:srgbClr val="7E8D9E"/>
                 </a:solidFill>
@@ -11371,6 +11643,13 @@
           </a:solidFill>
           <a:ln/>
         </p:spPr>
+        <p:txBody>
+          <a:bodyPr/>
+          <a:lstStyle/>
+          <a:p>
+            <a:endParaRPr lang="zh-CN" altLang="en-US"/>
+          </a:p>
+        </p:txBody>
       </p:sp>
       <p:sp>
         <p:nvSpPr>
@@ -11391,6 +11670,13 @@
           </a:solidFill>
           <a:ln/>
         </p:spPr>
+        <p:txBody>
+          <a:bodyPr/>
+          <a:lstStyle/>
+          <a:p>
+            <a:endParaRPr lang="zh-CN" altLang="en-US"/>
+          </a:p>
+        </p:txBody>
       </p:sp>
       <p:sp>
         <p:nvSpPr>
@@ -11411,6 +11697,13 @@
           </a:solidFill>
           <a:ln/>
         </p:spPr>
+        <p:txBody>
+          <a:bodyPr/>
+          <a:lstStyle/>
+          <a:p>
+            <a:endParaRPr lang="zh-CN" altLang="en-US"/>
+          </a:p>
+        </p:txBody>
       </p:sp>
       <p:sp>
         <p:nvSpPr>
@@ -11431,6 +11724,13 @@
           </a:solidFill>
           <a:ln/>
         </p:spPr>
+        <p:txBody>
+          <a:bodyPr/>
+          <a:lstStyle/>
+          <a:p>
+            <a:endParaRPr lang="zh-CN" altLang="en-US"/>
+          </a:p>
+        </p:txBody>
       </p:sp>
       <p:sp>
         <p:nvSpPr>
@@ -11451,6 +11751,13 @@
           </a:solidFill>
           <a:ln/>
         </p:spPr>
+        <p:txBody>
+          <a:bodyPr/>
+          <a:lstStyle/>
+          <a:p>
+            <a:endParaRPr lang="zh-CN" altLang="en-US"/>
+          </a:p>
+        </p:txBody>
       </p:sp>
       <p:sp>
         <p:nvSpPr>
@@ -11471,6 +11778,13 @@
           </a:solidFill>
           <a:ln/>
         </p:spPr>
+        <p:txBody>
+          <a:bodyPr/>
+          <a:lstStyle/>
+          <a:p>
+            <a:endParaRPr lang="zh-CN" altLang="en-US"/>
+          </a:p>
+        </p:txBody>
       </p:sp>
       <p:sp>
         <p:nvSpPr>
@@ -11491,6 +11805,13 @@
           </a:solidFill>
           <a:ln/>
         </p:spPr>
+        <p:txBody>
+          <a:bodyPr/>
+          <a:lstStyle/>
+          <a:p>
+            <a:endParaRPr lang="zh-CN" altLang="en-US"/>
+          </a:p>
+        </p:txBody>
       </p:sp>
       <p:sp>
         <p:nvSpPr>
@@ -11511,6 +11832,13 @@
           </a:solidFill>
           <a:ln/>
         </p:spPr>
+        <p:txBody>
+          <a:bodyPr/>
+          <a:lstStyle/>
+          <a:p>
+            <a:endParaRPr lang="zh-CN" altLang="en-US"/>
+          </a:p>
+        </p:txBody>
       </p:sp>
       <p:sp>
         <p:nvSpPr>
@@ -11531,6 +11859,13 @@
           </a:solidFill>
           <a:ln/>
         </p:spPr>
+        <p:txBody>
+          <a:bodyPr/>
+          <a:lstStyle/>
+          <a:p>
+            <a:endParaRPr lang="zh-CN" altLang="en-US"/>
+          </a:p>
+        </p:txBody>
       </p:sp>
       <p:sp>
         <p:nvSpPr>
@@ -11551,6 +11886,13 @@
           </a:solidFill>
           <a:ln/>
         </p:spPr>
+        <p:txBody>
+          <a:bodyPr/>
+          <a:lstStyle/>
+          <a:p>
+            <a:endParaRPr lang="zh-CN" altLang="en-US"/>
+          </a:p>
+        </p:txBody>
       </p:sp>
       <p:sp>
         <p:nvSpPr>
@@ -11571,6 +11913,13 @@
           </a:solidFill>
           <a:ln/>
         </p:spPr>
+        <p:txBody>
+          <a:bodyPr/>
+          <a:lstStyle/>
+          <a:p>
+            <a:endParaRPr lang="zh-CN" altLang="en-US"/>
+          </a:p>
+        </p:txBody>
       </p:sp>
       <p:sp>
         <p:nvSpPr>
@@ -11591,6 +11940,13 @@
           </a:solidFill>
           <a:ln/>
         </p:spPr>
+        <p:txBody>
+          <a:bodyPr/>
+          <a:lstStyle/>
+          <a:p>
+            <a:endParaRPr lang="zh-CN" altLang="en-US"/>
+          </a:p>
+        </p:txBody>
       </p:sp>
       <p:sp>
         <p:nvSpPr>
@@ -11611,6 +11967,13 @@
           </a:solidFill>
           <a:ln/>
         </p:spPr>
+        <p:txBody>
+          <a:bodyPr/>
+          <a:lstStyle/>
+          <a:p>
+            <a:endParaRPr lang="zh-CN" altLang="en-US"/>
+          </a:p>
+        </p:txBody>
       </p:sp>
       <p:sp>
         <p:nvSpPr>
@@ -11631,6 +11994,13 @@
           </a:solidFill>
           <a:ln/>
         </p:spPr>
+        <p:txBody>
+          <a:bodyPr/>
+          <a:lstStyle/>
+          <a:p>
+            <a:endParaRPr lang="zh-CN" altLang="en-US"/>
+          </a:p>
+        </p:txBody>
       </p:sp>
       <p:sp>
         <p:nvSpPr>
@@ -11651,6 +12021,13 @@
           </a:solidFill>
           <a:ln/>
         </p:spPr>
+        <p:txBody>
+          <a:bodyPr/>
+          <a:lstStyle/>
+          <a:p>
+            <a:endParaRPr lang="zh-CN" altLang="en-US"/>
+          </a:p>
+        </p:txBody>
       </p:sp>
       <p:sp>
         <p:nvSpPr>
@@ -11671,6 +12048,13 @@
           </a:solidFill>
           <a:ln/>
         </p:spPr>
+        <p:txBody>
+          <a:bodyPr/>
+          <a:lstStyle/>
+          <a:p>
+            <a:endParaRPr lang="zh-CN" altLang="en-US"/>
+          </a:p>
+        </p:txBody>
       </p:sp>
       <p:sp>
         <p:nvSpPr>
@@ -11691,6 +12075,13 @@
           </a:solidFill>
           <a:ln/>
         </p:spPr>
+        <p:txBody>
+          <a:bodyPr/>
+          <a:lstStyle/>
+          <a:p>
+            <a:endParaRPr lang="zh-CN" altLang="en-US"/>
+          </a:p>
+        </p:txBody>
       </p:sp>
       <p:sp>
         <p:nvSpPr>
@@ -11711,6 +12102,13 @@
           </a:solidFill>
           <a:ln/>
         </p:spPr>
+        <p:txBody>
+          <a:bodyPr/>
+          <a:lstStyle/>
+          <a:p>
+            <a:endParaRPr lang="zh-CN" altLang="en-US"/>
+          </a:p>
+        </p:txBody>
       </p:sp>
       <p:sp>
         <p:nvSpPr>
@@ -11731,6 +12129,13 @@
           </a:solidFill>
           <a:ln/>
         </p:spPr>
+        <p:txBody>
+          <a:bodyPr/>
+          <a:lstStyle/>
+          <a:p>
+            <a:endParaRPr lang="zh-CN" altLang="en-US"/>
+          </a:p>
+        </p:txBody>
       </p:sp>
       <p:sp>
         <p:nvSpPr>
@@ -11751,6 +12156,13 @@
           </a:solidFill>
           <a:ln/>
         </p:spPr>
+        <p:txBody>
+          <a:bodyPr/>
+          <a:lstStyle/>
+          <a:p>
+            <a:endParaRPr lang="zh-CN" altLang="en-US"/>
+          </a:p>
+        </p:txBody>
       </p:sp>
       <p:sp>
         <p:nvSpPr>
@@ -11774,6 +12186,13 @@
             <a:prstDash val="solid"/>
           </a:ln>
         </p:spPr>
+        <p:txBody>
+          <a:bodyPr/>
+          <a:lstStyle/>
+          <a:p>
+            <a:endParaRPr lang="zh-CN" altLang="en-US"/>
+          </a:p>
+        </p:txBody>
       </p:sp>
       <p:sp>
         <p:nvSpPr>
@@ -11796,7 +12215,7 @@
           <a:bodyPr wrap="square" lIns="0" tIns="0" rIns="0" bIns="0" rtlCol="0" anchor="ctr"/>
           <a:lstStyle/>
           <a:p>
-            <a:pPr indent="0" marL="0">
+            <a:pPr marL="0" indent="0">
               <a:buNone/>
             </a:pPr>
             <a:r>
@@ -11835,11 +12254,11 @@
           <a:bodyPr wrap="square" rtlCol="0" anchor="ctr"/>
           <a:lstStyle/>
           <a:p>
-            <a:pPr indent="0" marL="0">
-              <a:buNone/>
-            </a:pPr>
-            <a:r>
-              <a:rPr lang="en-US" sz="650" spc="200" kern="0" dirty="0">
+            <a:pPr marL="0" indent="0">
+              <a:buNone/>
+            </a:pPr>
+            <a:r>
+              <a:rPr lang="en-US" sz="650" kern="0" spc="200" dirty="0">
                 <a:solidFill>
                   <a:srgbClr val="7E8D9E"/>
                 </a:solidFill>
@@ -11874,7 +12293,7 @@
           <a:bodyPr wrap="square" rtlCol="0" anchor="ctr"/>
           <a:lstStyle/>
           <a:p>
-            <a:pPr algn="r" indent="0" marL="0">
+            <a:pPr marL="0" indent="0" algn="r">
               <a:buNone/>
             </a:pPr>
             <a:r>
@@ -11914,6 +12333,13 @@
             <a:prstDash val="solid"/>
           </a:ln>
         </p:spPr>
+        <p:txBody>
+          <a:bodyPr/>
+          <a:lstStyle/>
+          <a:p>
+            <a:endParaRPr lang="zh-CN" altLang="en-US"/>
+          </a:p>
+        </p:txBody>
       </p:sp>
     </p:spTree>
   </p:cSld>
@@ -11931,6 +12357,7 @@
         <a:solidFill>
           <a:srgbClr val="060E18"/>
         </a:solidFill>
+        <a:effectLst/>
       </p:bgPr>
     </p:bg>
     <p:spTree>
@@ -11968,7 +12395,7 @@
           <a:bodyPr wrap="square" lIns="0" tIns="0" rIns="0" bIns="0" rtlCol="0" anchor="ctr"/>
           <a:lstStyle/>
           <a:p>
-            <a:pPr indent="0" marL="0">
+            <a:pPr marL="0" indent="0">
               <a:buNone/>
             </a:pPr>
             <a:r>
@@ -12008,6 +12435,13 @@
             <a:prstDash val="solid"/>
           </a:ln>
         </p:spPr>
+        <p:txBody>
+          <a:bodyPr/>
+          <a:lstStyle/>
+          <a:p>
+            <a:endParaRPr lang="zh-CN" altLang="en-US"/>
+          </a:p>
+        </p:txBody>
       </p:sp>
       <p:sp>
         <p:nvSpPr>
@@ -12030,7 +12464,7 @@
           <a:bodyPr wrap="square" lIns="0" tIns="0" rIns="0" bIns="0" rtlCol="0" anchor="ctr"/>
           <a:lstStyle/>
           <a:p>
-            <a:pPr indent="0" marL="0">
+            <a:pPr marL="0" indent="0">
               <a:buNone/>
             </a:pPr>
             <a:r>
@@ -12067,6 +12501,13 @@
           </a:solidFill>
           <a:ln/>
         </p:spPr>
+        <p:txBody>
+          <a:bodyPr/>
+          <a:lstStyle/>
+          <a:p>
+            <a:endParaRPr lang="zh-CN" altLang="en-US"/>
+          </a:p>
+        </p:txBody>
       </p:sp>
       <p:sp>
         <p:nvSpPr>
@@ -12087,6 +12528,13 @@
           </a:solidFill>
           <a:ln/>
         </p:spPr>
+        <p:txBody>
+          <a:bodyPr/>
+          <a:lstStyle/>
+          <a:p>
+            <a:endParaRPr lang="zh-CN" altLang="en-US"/>
+          </a:p>
+        </p:txBody>
       </p:sp>
       <p:sp>
         <p:nvSpPr>
@@ -12109,7 +12557,7 @@
           <a:bodyPr wrap="square" lIns="0" tIns="0" rIns="0" bIns="0" rtlCol="0" anchor="ctr"/>
           <a:lstStyle/>
           <a:p>
-            <a:pPr indent="0" marL="0">
+            <a:pPr marL="0" indent="0">
               <a:buNone/>
             </a:pPr>
             <a:r>
@@ -12148,7 +12596,7 @@
           <a:bodyPr wrap="square" lIns="0" tIns="0" rIns="0" bIns="0" rtlCol="0" anchor="ctr"/>
           <a:lstStyle/>
           <a:p>
-            <a:pPr indent="0" marL="0">
+            <a:pPr marL="0" indent="0">
               <a:buNone/>
             </a:pPr>
             <a:r>
@@ -12187,7 +12635,7 @@
           <a:bodyPr wrap="square" lIns="0" tIns="0" rIns="0" bIns="0" rtlCol="0" anchor="ctr"/>
           <a:lstStyle/>
           <a:p>
-            <a:pPr indent="0" marL="0">
+            <a:pPr marL="0" indent="0">
               <a:buNone/>
             </a:pPr>
             <a:r>
@@ -12226,7 +12674,7 @@
           <a:bodyPr wrap="square" lIns="0" tIns="0" rIns="0" bIns="0" rtlCol="0" anchor="ctr"/>
           <a:lstStyle/>
           <a:p>
-            <a:pPr algn="ctr" indent="0" marL="0">
+            <a:pPr marL="0" indent="0" algn="ctr">
               <a:buNone/>
             </a:pPr>
             <a:r>
@@ -12260,6 +12708,13 @@
           </a:solidFill>
           <a:ln/>
         </p:spPr>
+        <p:txBody>
+          <a:bodyPr/>
+          <a:lstStyle/>
+          <a:p>
+            <a:endParaRPr lang="zh-CN" altLang="en-US"/>
+          </a:p>
+        </p:txBody>
       </p:sp>
       <p:sp>
         <p:nvSpPr>
@@ -12280,6 +12735,13 @@
           </a:solidFill>
           <a:ln/>
         </p:spPr>
+        <p:txBody>
+          <a:bodyPr/>
+          <a:lstStyle/>
+          <a:p>
+            <a:endParaRPr lang="zh-CN" altLang="en-US"/>
+          </a:p>
+        </p:txBody>
       </p:sp>
       <p:sp>
         <p:nvSpPr>
@@ -12302,7 +12764,7 @@
           <a:bodyPr wrap="square" lIns="0" tIns="0" rIns="0" bIns="0" rtlCol="0" anchor="ctr"/>
           <a:lstStyle/>
           <a:p>
-            <a:pPr indent="0" marL="0">
+            <a:pPr marL="0" indent="0">
               <a:buNone/>
             </a:pPr>
             <a:r>
@@ -12341,7 +12803,7 @@
           <a:bodyPr wrap="square" lIns="0" tIns="0" rIns="0" bIns="0" rtlCol="0" anchor="ctr"/>
           <a:lstStyle/>
           <a:p>
-            <a:pPr indent="0" marL="0">
+            <a:pPr marL="0" indent="0">
               <a:buNone/>
             </a:pPr>
             <a:r>
@@ -12380,7 +12842,7 @@
           <a:bodyPr wrap="square" lIns="0" tIns="0" rIns="0" bIns="0" rtlCol="0" anchor="ctr"/>
           <a:lstStyle/>
           <a:p>
-            <a:pPr indent="0" marL="0">
+            <a:pPr marL="0" indent="0">
               <a:buNone/>
             </a:pPr>
             <a:r>
@@ -12419,7 +12881,7 @@
           <a:bodyPr wrap="square" lIns="0" tIns="0" rIns="0" bIns="0" rtlCol="0" anchor="ctr"/>
           <a:lstStyle/>
           <a:p>
-            <a:pPr algn="ctr" indent="0" marL="0">
+            <a:pPr marL="0" indent="0" algn="ctr">
               <a:buNone/>
             </a:pPr>
             <a:r>
@@ -12453,6 +12915,13 @@
           </a:solidFill>
           <a:ln/>
         </p:spPr>
+        <p:txBody>
+          <a:bodyPr/>
+          <a:lstStyle/>
+          <a:p>
+            <a:endParaRPr lang="zh-CN" altLang="en-US"/>
+          </a:p>
+        </p:txBody>
       </p:sp>
       <p:sp>
         <p:nvSpPr>
@@ -12473,6 +12942,13 @@
           </a:solidFill>
           <a:ln/>
         </p:spPr>
+        <p:txBody>
+          <a:bodyPr/>
+          <a:lstStyle/>
+          <a:p>
+            <a:endParaRPr lang="zh-CN" altLang="en-US"/>
+          </a:p>
+        </p:txBody>
       </p:sp>
       <p:sp>
         <p:nvSpPr>
@@ -12495,7 +12971,7 @@
           <a:bodyPr wrap="square" lIns="0" tIns="0" rIns="0" bIns="0" rtlCol="0" anchor="ctr"/>
           <a:lstStyle/>
           <a:p>
-            <a:pPr indent="0" marL="0">
+            <a:pPr marL="0" indent="0">
               <a:buNone/>
             </a:pPr>
             <a:r>
@@ -12534,7 +13010,7 @@
           <a:bodyPr wrap="square" lIns="0" tIns="0" rIns="0" bIns="0" rtlCol="0" anchor="ctr"/>
           <a:lstStyle/>
           <a:p>
-            <a:pPr indent="0" marL="0">
+            <a:pPr marL="0" indent="0">
               <a:buNone/>
             </a:pPr>
             <a:r>
@@ -12573,7 +13049,7 @@
           <a:bodyPr wrap="square" lIns="0" tIns="0" rIns="0" bIns="0" rtlCol="0" anchor="ctr"/>
           <a:lstStyle/>
           <a:p>
-            <a:pPr indent="0" marL="0">
+            <a:pPr marL="0" indent="0">
               <a:buNone/>
             </a:pPr>
             <a:r>
@@ -12610,6 +13086,13 @@
           </a:solidFill>
           <a:ln/>
         </p:spPr>
+        <p:txBody>
+          <a:bodyPr/>
+          <a:lstStyle/>
+          <a:p>
+            <a:endParaRPr lang="zh-CN" altLang="en-US"/>
+          </a:p>
+        </p:txBody>
       </p:sp>
       <p:sp>
         <p:nvSpPr>
@@ -12630,6 +13113,13 @@
           </a:solidFill>
           <a:ln/>
         </p:spPr>
+        <p:txBody>
+          <a:bodyPr/>
+          <a:lstStyle/>
+          <a:p>
+            <a:endParaRPr lang="zh-CN" altLang="en-US"/>
+          </a:p>
+        </p:txBody>
       </p:sp>
       <p:sp>
         <p:nvSpPr>
@@ -12652,7 +13142,7 @@
           <a:bodyPr wrap="square" lIns="0" tIns="0" rIns="0" bIns="0" rtlCol="0" anchor="ctr"/>
           <a:lstStyle/>
           <a:p>
-            <a:pPr indent="0" marL="0">
+            <a:pPr marL="0" indent="0">
               <a:buNone/>
             </a:pPr>
             <a:r>
@@ -12691,7 +13181,7 @@
           <a:bodyPr wrap="square" lIns="0" tIns="0" rIns="0" bIns="0" rtlCol="0" anchor="ctr"/>
           <a:lstStyle/>
           <a:p>
-            <a:pPr indent="0" marL="0">
+            <a:pPr marL="0" indent="0">
               <a:buNone/>
             </a:pPr>
             <a:r>
@@ -12730,7 +13220,7 @@
           <a:bodyPr wrap="square" lIns="0" tIns="0" rIns="0" bIns="0" rtlCol="0" anchor="ctr"/>
           <a:lstStyle/>
           <a:p>
-            <a:pPr indent="0" marL="0">
+            <a:pPr marL="0" indent="0">
               <a:buNone/>
             </a:pPr>
             <a:r>
@@ -12769,7 +13259,7 @@
           <a:bodyPr wrap="square" lIns="0" tIns="0" rIns="0" bIns="0" rtlCol="0" anchor="ctr"/>
           <a:lstStyle/>
           <a:p>
-            <a:pPr algn="ctr" indent="0" marL="0">
+            <a:pPr marL="0" indent="0" algn="ctr">
               <a:buNone/>
             </a:pPr>
             <a:r>
@@ -12803,6 +13293,13 @@
           </a:solidFill>
           <a:ln/>
         </p:spPr>
+        <p:txBody>
+          <a:bodyPr/>
+          <a:lstStyle/>
+          <a:p>
+            <a:endParaRPr lang="zh-CN" altLang="en-US"/>
+          </a:p>
+        </p:txBody>
       </p:sp>
       <p:sp>
         <p:nvSpPr>
@@ -12823,6 +13320,13 @@
           </a:solidFill>
           <a:ln/>
         </p:spPr>
+        <p:txBody>
+          <a:bodyPr/>
+          <a:lstStyle/>
+          <a:p>
+            <a:endParaRPr lang="zh-CN" altLang="en-US"/>
+          </a:p>
+        </p:txBody>
       </p:sp>
       <p:sp>
         <p:nvSpPr>
@@ -12845,7 +13349,7 @@
           <a:bodyPr wrap="square" lIns="0" tIns="0" rIns="0" bIns="0" rtlCol="0" anchor="ctr"/>
           <a:lstStyle/>
           <a:p>
-            <a:pPr indent="0" marL="0">
+            <a:pPr marL="0" indent="0">
               <a:buNone/>
             </a:pPr>
             <a:r>
@@ -12884,7 +13388,7 @@
           <a:bodyPr wrap="square" lIns="0" tIns="0" rIns="0" bIns="0" rtlCol="0" anchor="ctr"/>
           <a:lstStyle/>
           <a:p>
-            <a:pPr indent="0" marL="0">
+            <a:pPr marL="0" indent="0">
               <a:buNone/>
             </a:pPr>
             <a:r>
@@ -12923,7 +13427,7 @@
           <a:bodyPr wrap="square" lIns="0" tIns="0" rIns="0" bIns="0" rtlCol="0" anchor="ctr"/>
           <a:lstStyle/>
           <a:p>
-            <a:pPr indent="0" marL="0">
+            <a:pPr marL="0" indent="0">
               <a:buNone/>
             </a:pPr>
             <a:r>
@@ -12962,7 +13466,7 @@
           <a:bodyPr wrap="square" lIns="0" tIns="0" rIns="0" bIns="0" rtlCol="0" anchor="ctr"/>
           <a:lstStyle/>
           <a:p>
-            <a:pPr algn="ctr" indent="0" marL="0">
+            <a:pPr marL="0" indent="0" algn="ctr">
               <a:buNone/>
             </a:pPr>
             <a:r>
@@ -12996,6 +13500,13 @@
           </a:solidFill>
           <a:ln/>
         </p:spPr>
+        <p:txBody>
+          <a:bodyPr/>
+          <a:lstStyle/>
+          <a:p>
+            <a:endParaRPr lang="zh-CN" altLang="en-US"/>
+          </a:p>
+        </p:txBody>
       </p:sp>
       <p:sp>
         <p:nvSpPr>
@@ -13016,6 +13527,13 @@
           </a:solidFill>
           <a:ln/>
         </p:spPr>
+        <p:txBody>
+          <a:bodyPr/>
+          <a:lstStyle/>
+          <a:p>
+            <a:endParaRPr lang="zh-CN" altLang="en-US"/>
+          </a:p>
+        </p:txBody>
       </p:sp>
       <p:sp>
         <p:nvSpPr>
@@ -13038,7 +13556,7 @@
           <a:bodyPr wrap="square" lIns="0" tIns="0" rIns="0" bIns="0" rtlCol="0" anchor="ctr"/>
           <a:lstStyle/>
           <a:p>
-            <a:pPr indent="0" marL="0">
+            <a:pPr marL="0" indent="0">
               <a:buNone/>
             </a:pPr>
             <a:r>
@@ -13077,7 +13595,7 @@
           <a:bodyPr wrap="square" lIns="0" tIns="0" rIns="0" bIns="0" rtlCol="0" anchor="ctr"/>
           <a:lstStyle/>
           <a:p>
-            <a:pPr indent="0" marL="0">
+            <a:pPr marL="0" indent="0">
               <a:buNone/>
             </a:pPr>
             <a:r>
@@ -13116,7 +13634,7 @@
           <a:bodyPr wrap="square" lIns="0" tIns="0" rIns="0" bIns="0" rtlCol="0" anchor="ctr"/>
           <a:lstStyle/>
           <a:p>
-            <a:pPr indent="0" marL="0">
+            <a:pPr marL="0" indent="0">
               <a:buNone/>
             </a:pPr>
             <a:r>
@@ -13131,68 +13649,6 @@
               <a:t>AI refines</a:t>
             </a:r>
             <a:endParaRPr lang="en-US" sz="900" dirty="0"/>
-          </a:p>
-        </p:txBody>
-      </p:sp>
-      <p:sp>
-        <p:nvSpPr>
-          <p:cNvPr id="39" name="Shape 37"/>
-          <p:cNvSpPr/>
-          <p:nvPr/>
-        </p:nvSpPr>
-        <p:spPr>
-          <a:xfrm>
-            <a:off x="502920" y="4526280"/>
-            <a:ext cx="8138160" cy="0"/>
-          </a:xfrm>
-          <a:prstGeom prst="line">
-            <a:avLst/>
-          </a:prstGeom>
-          <a:noFill/>
-          <a:ln w="3810">
-            <a:solidFill>
-              <a:srgbClr val="1A2D42"/>
-            </a:solidFill>
-            <a:prstDash val="solid"/>
-          </a:ln>
-        </p:spPr>
-      </p:sp>
-      <p:sp>
-        <p:nvSpPr>
-          <p:cNvPr id="40" name="Text 38"/>
-          <p:cNvSpPr/>
-          <p:nvPr/>
-        </p:nvSpPr>
-        <p:spPr>
-          <a:xfrm>
-            <a:off x="502920" y="4617720"/>
-            <a:ext cx="8138160" cy="137160"/>
-          </a:xfrm>
-          <a:prstGeom prst="rect">
-            <a:avLst/>
-          </a:prstGeom>
-          <a:noFill/>
-          <a:ln/>
-        </p:spPr>
-        <p:txBody>
-          <a:bodyPr wrap="square" lIns="0" tIns="0" rIns="0" bIns="0" rtlCol="0" anchor="ctr"/>
-          <a:lstStyle/>
-          <a:p>
-            <a:pPr indent="0" marL="0">
-              <a:buNone/>
-            </a:pPr>
-            <a:r>
-              <a:rPr lang="en-US" sz="750" dirty="0">
-                <a:solidFill>
-                  <a:srgbClr val="007A6A"/>
-                </a:solidFill>
-                <a:latin typeface="Consolas" pitchFamily="34" charset="0"/>
-                <a:ea typeface="Consolas" pitchFamily="34" charset="-122"/>
-                <a:cs typeface="Consolas" pitchFamily="34" charset="-120"/>
-              </a:rPr>
-              <a:t>Two open-source repos. One closed loop. github.com/newbison/AI_CHEMIST · github.com/newbison/spc-batch-monitor</a:t>
-            </a:r>
-            <a:endParaRPr lang="en-US" sz="750" dirty="0"/>
           </a:p>
         </p:txBody>
       </p:sp>
@@ -13217,11 +13673,11 @@
           <a:bodyPr wrap="square" rtlCol="0" anchor="ctr"/>
           <a:lstStyle/>
           <a:p>
-            <a:pPr indent="0" marL="0">
-              <a:buNone/>
-            </a:pPr>
-            <a:r>
-              <a:rPr lang="en-US" sz="650" spc="200" kern="0" dirty="0">
+            <a:pPr marL="0" indent="0">
+              <a:buNone/>
+            </a:pPr>
+            <a:r>
+              <a:rPr lang="en-US" sz="650" kern="0" spc="200" dirty="0">
                 <a:solidFill>
                   <a:srgbClr val="7E8D9E"/>
                 </a:solidFill>
@@ -13256,7 +13712,7 @@
           <a:bodyPr wrap="square" rtlCol="0" anchor="ctr"/>
           <a:lstStyle/>
           <a:p>
-            <a:pPr algn="r" indent="0" marL="0">
+            <a:pPr marL="0" indent="0" algn="r">
               <a:buNone/>
             </a:pPr>
             <a:r>
@@ -13296,6 +13752,13 @@
             <a:prstDash val="solid"/>
           </a:ln>
         </p:spPr>
+        <p:txBody>
+          <a:bodyPr/>
+          <a:lstStyle/>
+          <a:p>
+            <a:endParaRPr lang="zh-CN" altLang="en-US"/>
+          </a:p>
+        </p:txBody>
       </p:sp>
     </p:spTree>
   </p:cSld>
@@ -13313,6 +13776,7 @@
         <a:solidFill>
           <a:srgbClr val="060E18"/>
         </a:solidFill>
+        <a:effectLst/>
       </p:bgPr>
     </p:bg>
     <p:spTree>
@@ -13350,7 +13814,7 @@
           <a:bodyPr wrap="square" lIns="0" tIns="0" rIns="0" bIns="0" rtlCol="0" anchor="ctr"/>
           <a:lstStyle/>
           <a:p>
-            <a:pPr indent="0" marL="0">
+            <a:pPr marL="0" indent="0">
               <a:buNone/>
             </a:pPr>
             <a:r>
@@ -13390,6 +13854,13 @@
             <a:prstDash val="solid"/>
           </a:ln>
         </p:spPr>
+        <p:txBody>
+          <a:bodyPr/>
+          <a:lstStyle/>
+          <a:p>
+            <a:endParaRPr lang="zh-CN" altLang="en-US"/>
+          </a:p>
+        </p:txBody>
       </p:sp>
       <p:sp>
         <p:nvSpPr>
@@ -13412,7 +13883,7 @@
           <a:bodyPr wrap="square" lIns="0" tIns="0" rIns="0" bIns="0" rtlCol="0" anchor="ctr"/>
           <a:lstStyle/>
           <a:p>
-            <a:pPr indent="0" marL="0">
+            <a:pPr marL="0" indent="0">
               <a:buNone/>
             </a:pPr>
             <a:r>
@@ -13449,6 +13920,13 @@
           </a:solidFill>
           <a:ln/>
         </p:spPr>
+        <p:txBody>
+          <a:bodyPr/>
+          <a:lstStyle/>
+          <a:p>
+            <a:endParaRPr lang="zh-CN" altLang="en-US"/>
+          </a:p>
+        </p:txBody>
       </p:sp>
       <p:sp>
         <p:nvSpPr>
@@ -13471,7 +13949,7 @@
           <a:bodyPr wrap="square" lIns="0" tIns="0" rIns="0" bIns="0" rtlCol="0" anchor="ctr"/>
           <a:lstStyle/>
           <a:p>
-            <a:pPr indent="0" marL="0">
+            <a:pPr marL="0" indent="0">
               <a:buNone/>
             </a:pPr>
             <a:r>
@@ -13511,6 +13989,13 @@
             <a:prstDash val="solid"/>
           </a:ln>
         </p:spPr>
+        <p:txBody>
+          <a:bodyPr/>
+          <a:lstStyle/>
+          <a:p>
+            <a:endParaRPr lang="zh-CN" altLang="en-US"/>
+          </a:p>
+        </p:txBody>
       </p:sp>
       <p:sp>
         <p:nvSpPr>
@@ -13731,6 +14216,13 @@
           </a:solidFill>
           <a:ln/>
         </p:spPr>
+        <p:txBody>
+          <a:bodyPr/>
+          <a:lstStyle/>
+          <a:p>
+            <a:endParaRPr lang="zh-CN" altLang="en-US"/>
+          </a:p>
+        </p:txBody>
       </p:sp>
       <p:sp>
         <p:nvSpPr>
@@ -13753,7 +14245,7 @@
           <a:bodyPr wrap="square" lIns="0" tIns="0" rIns="0" bIns="0" rtlCol="0" anchor="ctr"/>
           <a:lstStyle/>
           <a:p>
-            <a:pPr indent="0" marL="0">
+            <a:pPr marL="0" indent="0">
               <a:buNone/>
             </a:pPr>
             <a:r>
@@ -13793,6 +14285,13 @@
             <a:prstDash val="solid"/>
           </a:ln>
         </p:spPr>
+        <p:txBody>
+          <a:bodyPr/>
+          <a:lstStyle/>
+          <a:p>
+            <a:endParaRPr lang="zh-CN" altLang="en-US"/>
+          </a:p>
+        </p:txBody>
       </p:sp>
       <p:sp>
         <p:nvSpPr>
@@ -14013,6 +14512,13 @@
           </a:solidFill>
           <a:ln/>
         </p:spPr>
+        <p:txBody>
+          <a:bodyPr/>
+          <a:lstStyle/>
+          <a:p>
+            <a:endParaRPr lang="zh-CN" altLang="en-US"/>
+          </a:p>
+        </p:txBody>
       </p:sp>
       <p:sp>
         <p:nvSpPr>
@@ -14035,7 +14541,7 @@
           <a:bodyPr wrap="square" lIns="0" tIns="0" rIns="0" bIns="0" rtlCol="0" anchor="ctr"/>
           <a:lstStyle/>
           <a:p>
-            <a:pPr indent="0" marL="0">
+            <a:pPr marL="0" indent="0">
               <a:buNone/>
             </a:pPr>
             <a:r>
@@ -14075,6 +14581,13 @@
             <a:prstDash val="solid"/>
           </a:ln>
         </p:spPr>
+        <p:txBody>
+          <a:bodyPr/>
+          <a:lstStyle/>
+          <a:p>
+            <a:endParaRPr lang="zh-CN" altLang="en-US"/>
+          </a:p>
+        </p:txBody>
       </p:sp>
       <p:sp>
         <p:nvSpPr>
@@ -14297,11 +14810,11 @@
           <a:bodyPr wrap="square" rtlCol="0" anchor="ctr"/>
           <a:lstStyle/>
           <a:p>
-            <a:pPr indent="0" marL="0">
-              <a:buNone/>
-            </a:pPr>
-            <a:r>
-              <a:rPr lang="en-US" sz="650" spc="200" kern="0" dirty="0">
+            <a:pPr marL="0" indent="0">
+              <a:buNone/>
+            </a:pPr>
+            <a:r>
+              <a:rPr lang="en-US" sz="650" kern="0" spc="200" dirty="0">
                 <a:solidFill>
                   <a:srgbClr val="7E8D9E"/>
                 </a:solidFill>
@@ -14336,7 +14849,7 @@
           <a:bodyPr wrap="square" rtlCol="0" anchor="ctr"/>
           <a:lstStyle/>
           <a:p>
-            <a:pPr algn="r" indent="0" marL="0">
+            <a:pPr marL="0" indent="0" algn="r">
               <a:buNone/>
             </a:pPr>
             <a:r>
@@ -14376,6 +14889,13 @@
             <a:prstDash val="solid"/>
           </a:ln>
         </p:spPr>
+        <p:txBody>
+          <a:bodyPr/>
+          <a:lstStyle/>
+          <a:p>
+            <a:endParaRPr lang="zh-CN" altLang="en-US"/>
+          </a:p>
+        </p:txBody>
       </p:sp>
     </p:spTree>
   </p:cSld>
@@ -14678,4 +15198,319 @@
     </a:ext>
   </a:extLst>
 </a:theme>
+</file>
+
+<file path=ppt/theme/theme2.xml><?xml version="1.0" encoding="utf-8"?>
+<a:theme xmlns:a="http://schemas.openxmlformats.org/drawingml/2006/main" name="Office Theme">
+  <a:themeElements>
+    <a:clrScheme name="Office">
+      <a:dk1>
+        <a:sysClr val="windowText" lastClr="000000"/>
+      </a:dk1>
+      <a:lt1>
+        <a:sysClr val="window" lastClr="FFFFFF"/>
+      </a:lt1>
+      <a:dk2>
+        <a:srgbClr val="0E2841"/>
+      </a:dk2>
+      <a:lt2>
+        <a:srgbClr val="E8E8E8"/>
+      </a:lt2>
+      <a:accent1>
+        <a:srgbClr val="156082"/>
+      </a:accent1>
+      <a:accent2>
+        <a:srgbClr val="E97132"/>
+      </a:accent2>
+      <a:accent3>
+        <a:srgbClr val="196B24"/>
+      </a:accent3>
+      <a:accent4>
+        <a:srgbClr val="0F9ED5"/>
+      </a:accent4>
+      <a:accent5>
+        <a:srgbClr val="A02B93"/>
+      </a:accent5>
+      <a:accent6>
+        <a:srgbClr val="4EA72E"/>
+      </a:accent6>
+      <a:hlink>
+        <a:srgbClr val="467886"/>
+      </a:hlink>
+      <a:folHlink>
+        <a:srgbClr val="96607D"/>
+      </a:folHlink>
+    </a:clrScheme>
+    <a:fontScheme name="Office">
+      <a:majorFont>
+        <a:latin typeface="等线 Light" panose="02110004020202020204"/>
+        <a:ea typeface=""/>
+        <a:cs typeface=""/>
+        <a:font script="Jpan" typeface="游ゴシック Light"/>
+        <a:font script="Hang" typeface="맑은 고딕"/>
+        <a:font script="Hans" typeface="等线 Light"/>
+        <a:font script="Hant" typeface="新細明體"/>
+        <a:font script="Arab" typeface="Times New Roman"/>
+        <a:font script="Hebr" typeface="Times New Roman"/>
+        <a:font script="Thai" typeface="Angsana New"/>
+        <a:font script="Ethi" typeface="Nyala"/>
+        <a:font script="Beng" typeface="Vrinda"/>
+        <a:font script="Gujr" typeface="Shruti"/>
+        <a:font script="Khmr" typeface="MoolBoran"/>
+        <a:font script="Knda" typeface="Tunga"/>
+        <a:font script="Guru" typeface="Raavi"/>
+        <a:font script="Cans" typeface="Euphemia"/>
+        <a:font script="Cher" typeface="Plantagenet Cherokee"/>
+        <a:font script="Yiii" typeface="Microsoft Yi Baiti"/>
+        <a:font script="Tibt" typeface="Microsoft Himalaya"/>
+        <a:font script="Thaa" typeface="MV Boli"/>
+        <a:font script="Deva" typeface="Mangal"/>
+        <a:font script="Telu" typeface="Gautami"/>
+        <a:font script="Taml" typeface="Latha"/>
+        <a:font script="Syrc" typeface="Estrangelo Edessa"/>
+        <a:font script="Orya" typeface="Kalinga"/>
+        <a:font script="Mlym" typeface="Kartika"/>
+        <a:font script="Laoo" typeface="DokChampa"/>
+        <a:font script="Sinh" typeface="Iskoola Pota"/>
+        <a:font script="Mong" typeface="Mongolian Baiti"/>
+        <a:font script="Viet" typeface="Times New Roman"/>
+        <a:font script="Uigh" typeface="Microsoft Uighur"/>
+        <a:font script="Geor" typeface="Sylfaen"/>
+        <a:font script="Armn" typeface="Arial"/>
+        <a:font script="Bugi" typeface="Leelawadee UI"/>
+        <a:font script="Bopo" typeface="Microsoft JhengHei"/>
+        <a:font script="Java" typeface="Javanese Text"/>
+        <a:font script="Lisu" typeface="Segoe UI"/>
+        <a:font script="Mymr" typeface="Myanmar Text"/>
+        <a:font script="Nkoo" typeface="Ebrima"/>
+        <a:font script="Olck" typeface="Nirmala UI"/>
+        <a:font script="Osma" typeface="Ebrima"/>
+        <a:font script="Phag" typeface="Phagspa"/>
+        <a:font script="Syrn" typeface="Estrangelo Edessa"/>
+        <a:font script="Syrj" typeface="Estrangelo Edessa"/>
+        <a:font script="Syre" typeface="Estrangelo Edessa"/>
+        <a:font script="Sora" typeface="Nirmala UI"/>
+        <a:font script="Tale" typeface="Microsoft Tai Le"/>
+        <a:font script="Talu" typeface="Microsoft New Tai Lue"/>
+        <a:font script="Tfng" typeface="Ebrima"/>
+      </a:majorFont>
+      <a:minorFont>
+        <a:latin typeface="等线" panose="02110004020202020204"/>
+        <a:ea typeface=""/>
+        <a:cs typeface=""/>
+        <a:font script="Jpan" typeface="游ゴシック"/>
+        <a:font script="Hang" typeface="맑은 고딕"/>
+        <a:font script="Hans" typeface="等线"/>
+        <a:font script="Hant" typeface="新細明體"/>
+        <a:font script="Arab" typeface="Arial"/>
+        <a:font script="Hebr" typeface="Arial"/>
+        <a:font script="Thai" typeface="Cordia New"/>
+        <a:font script="Ethi" typeface="Nyala"/>
+        <a:font script="Beng" typeface="Vrinda"/>
+        <a:font script="Gujr" typeface="Shruti"/>
+        <a:font script="Khmr" typeface="DaunPenh"/>
+        <a:font script="Knda" typeface="Tunga"/>
+        <a:font script="Guru" typeface="Raavi"/>
+        <a:font script="Cans" typeface="Euphemia"/>
+        <a:font script="Cher" typeface="Plantagenet Cherokee"/>
+        <a:font script="Yiii" typeface="Microsoft Yi Baiti"/>
+        <a:font script="Tibt" typeface="Microsoft Himalaya"/>
+        <a:font script="Thaa" typeface="MV Boli"/>
+        <a:font script="Deva" typeface="Mangal"/>
+        <a:font script="Telu" typeface="Gautami"/>
+        <a:font script="Taml" typeface="Latha"/>
+        <a:font script="Syrc" typeface="Estrangelo Edessa"/>
+        <a:font script="Orya" typeface="Kalinga"/>
+        <a:font script="Mlym" typeface="Kartika"/>
+        <a:font script="Laoo" typeface="DokChampa"/>
+        <a:font script="Sinh" typeface="Iskoola Pota"/>
+        <a:font script="Mong" typeface="Mongolian Baiti"/>
+        <a:font script="Viet" typeface="Arial"/>
+        <a:font script="Uigh" typeface="Microsoft Uighur"/>
+        <a:font script="Geor" typeface="Sylfaen"/>
+        <a:font script="Armn" typeface="Arial"/>
+        <a:font script="Bugi" typeface="Leelawadee UI"/>
+        <a:font script="Bopo" typeface="Microsoft JhengHei"/>
+        <a:font script="Java" typeface="Javanese Text"/>
+        <a:font script="Lisu" typeface="Segoe UI"/>
+        <a:font script="Mymr" typeface="Myanmar Text"/>
+        <a:font script="Nkoo" typeface="Ebrima"/>
+        <a:font script="Olck" typeface="Nirmala UI"/>
+        <a:font script="Osma" typeface="Ebrima"/>
+        <a:font script="Phag" typeface="Phagspa"/>
+        <a:font script="Syrn" typeface="Estrangelo Edessa"/>
+        <a:font script="Syrj" typeface="Estrangelo Edessa"/>
+        <a:font script="Syre" typeface="Estrangelo Edessa"/>
+        <a:font script="Sora" typeface="Nirmala UI"/>
+        <a:font script="Tale" typeface="Microsoft Tai Le"/>
+        <a:font script="Talu" typeface="Microsoft New Tai Lue"/>
+        <a:font script="Tfng" typeface="Ebrima"/>
+      </a:minorFont>
+    </a:fontScheme>
+    <a:fmtScheme name="Office">
+      <a:fillStyleLst>
+        <a:solidFill>
+          <a:schemeClr val="phClr"/>
+        </a:solidFill>
+        <a:gradFill rotWithShape="1">
+          <a:gsLst>
+            <a:gs pos="0">
+              <a:schemeClr val="phClr">
+                <a:lumMod val="110000"/>
+                <a:satMod val="105000"/>
+                <a:tint val="67000"/>
+              </a:schemeClr>
+            </a:gs>
+            <a:gs pos="50000">
+              <a:schemeClr val="phClr">
+                <a:lumMod val="105000"/>
+                <a:satMod val="103000"/>
+                <a:tint val="73000"/>
+              </a:schemeClr>
+            </a:gs>
+            <a:gs pos="100000">
+              <a:schemeClr val="phClr">
+                <a:lumMod val="105000"/>
+                <a:satMod val="109000"/>
+                <a:tint val="81000"/>
+              </a:schemeClr>
+            </a:gs>
+          </a:gsLst>
+          <a:lin ang="5400000" scaled="0"/>
+        </a:gradFill>
+        <a:gradFill rotWithShape="1">
+          <a:gsLst>
+            <a:gs pos="0">
+              <a:schemeClr val="phClr">
+                <a:satMod val="103000"/>
+                <a:lumMod val="102000"/>
+                <a:tint val="94000"/>
+              </a:schemeClr>
+            </a:gs>
+            <a:gs pos="50000">
+              <a:schemeClr val="phClr">
+                <a:satMod val="110000"/>
+                <a:lumMod val="100000"/>
+                <a:shade val="100000"/>
+              </a:schemeClr>
+            </a:gs>
+            <a:gs pos="100000">
+              <a:schemeClr val="phClr">
+                <a:lumMod val="99000"/>
+                <a:satMod val="120000"/>
+                <a:shade val="78000"/>
+              </a:schemeClr>
+            </a:gs>
+          </a:gsLst>
+          <a:lin ang="5400000" scaled="0"/>
+        </a:gradFill>
+      </a:fillStyleLst>
+      <a:lnStyleLst>
+        <a:ln w="12700" cap="flat" cmpd="sng" algn="ctr">
+          <a:solidFill>
+            <a:schemeClr val="phClr"/>
+          </a:solidFill>
+          <a:prstDash val="solid"/>
+          <a:miter lim="800000"/>
+        </a:ln>
+        <a:ln w="19050" cap="flat" cmpd="sng" algn="ctr">
+          <a:solidFill>
+            <a:schemeClr val="phClr"/>
+          </a:solidFill>
+          <a:prstDash val="solid"/>
+          <a:miter lim="800000"/>
+        </a:ln>
+        <a:ln w="25400" cap="flat" cmpd="sng" algn="ctr">
+          <a:solidFill>
+            <a:schemeClr val="phClr"/>
+          </a:solidFill>
+          <a:prstDash val="solid"/>
+          <a:miter lim="800000"/>
+        </a:ln>
+      </a:lnStyleLst>
+      <a:effectStyleLst>
+        <a:effectStyle>
+          <a:effectLst/>
+        </a:effectStyle>
+        <a:effectStyle>
+          <a:effectLst/>
+        </a:effectStyle>
+        <a:effectStyle>
+          <a:effectLst>
+            <a:outerShdw blurRad="57150" dist="19050" dir="5400000" algn="ctr" rotWithShape="0">
+              <a:srgbClr val="000000">
+                <a:alpha val="63000"/>
+              </a:srgbClr>
+            </a:outerShdw>
+          </a:effectLst>
+        </a:effectStyle>
+      </a:effectStyleLst>
+      <a:bgFillStyleLst>
+        <a:solidFill>
+          <a:schemeClr val="phClr"/>
+        </a:solidFill>
+        <a:solidFill>
+          <a:schemeClr val="phClr">
+            <a:tint val="95000"/>
+            <a:satMod val="170000"/>
+          </a:schemeClr>
+        </a:solidFill>
+        <a:gradFill rotWithShape="1">
+          <a:gsLst>
+            <a:gs pos="0">
+              <a:schemeClr val="phClr">
+                <a:tint val="93000"/>
+                <a:satMod val="150000"/>
+                <a:shade val="98000"/>
+                <a:lumMod val="102000"/>
+              </a:schemeClr>
+            </a:gs>
+            <a:gs pos="50000">
+              <a:schemeClr val="phClr">
+                <a:tint val="98000"/>
+                <a:satMod val="130000"/>
+                <a:shade val="90000"/>
+                <a:lumMod val="103000"/>
+              </a:schemeClr>
+            </a:gs>
+            <a:gs pos="100000">
+              <a:schemeClr val="phClr">
+                <a:shade val="63000"/>
+                <a:satMod val="120000"/>
+              </a:schemeClr>
+            </a:gs>
+          </a:gsLst>
+          <a:lin ang="5400000" scaled="0"/>
+        </a:gradFill>
+      </a:bgFillStyleLst>
+    </a:fmtScheme>
+  </a:themeElements>
+  <a:objectDefaults>
+    <a:lnDef>
+      <a:spPr/>
+      <a:bodyPr/>
+      <a:lstStyle/>
+      <a:style>
+        <a:lnRef idx="2">
+          <a:schemeClr val="accent1"/>
+        </a:lnRef>
+        <a:fillRef idx="0">
+          <a:schemeClr val="accent1"/>
+        </a:fillRef>
+        <a:effectRef idx="1">
+          <a:schemeClr val="accent1"/>
+        </a:effectRef>
+        <a:fontRef idx="minor">
+          <a:schemeClr val="tx1"/>
+        </a:fontRef>
+      </a:style>
+    </a:lnDef>
+  </a:objectDefaults>
+  <a:extraClrSchemeLst/>
+  <a:extLst>
+    <a:ext uri="{05A4C25C-085E-4340-85A3-A5531E510DB2}">
+      <thm15:themeFamily xmlns:thm15="http://schemas.microsoft.com/office/thememl/2012/main" name="Office Theme" id="{2E142A2C-CD16-42D6-873A-C26D2A0506FA}" vid="{1BDDFF52-6CD6-40A5-AB3C-68EB2F1E4D0A}"/>
+    </a:ext>
+  </a:extLst>
+</a:theme>
 </file>
--- a/ppt/FORGE_AI_Deck.pptx
+++ b/ppt/FORGE_AI_Deck.pptx
@@ -1606,7 +1606,7 @@
                 <a:ea typeface="Calibri" pitchFamily="34" charset="-122"/>
                 <a:cs typeface="Calibri" pitchFamily="34" charset="-120"/>
               </a:rPr>
-              <a:t>The AI-Native R&amp;D Platform for Materials Companies</a:t>
+              <a:t>Revolutionize Your Innovation Process for Materials Companies</a:t>
             </a:r>
             <a:endParaRPr lang="en-US" sz="1300" dirty="0"/>
           </a:p>

--- a/ppt/FORGE_AI_Deck.pptx
+++ b/ppt/FORGE_AI_Deck.pptx
@@ -1512,7 +1512,7 @@
         </p:nvSpPr>
         <p:spPr>
           <a:xfrm>
-            <a:off x="793193" y="1937619"/>
+            <a:off x="718938" y="1937619"/>
             <a:ext cx="4388407" cy="0"/>
           </a:xfrm>
           <a:prstGeom prst="line">
@@ -1594,9 +1594,6 @@
           <a:bodyPr wrap="square" lIns="0" tIns="0" rIns="0" bIns="0" rtlCol="0" anchor="ctr"/>
           <a:lstStyle/>
           <a:p>
-            <a:pPr marL="0" indent="0">
-              <a:buNone/>
-            </a:pPr>
             <a:r>
               <a:rPr lang="en-US" sz="1300" dirty="0">
                 <a:solidFill>
@@ -1606,7 +1603,18 @@
                 <a:ea typeface="Calibri" pitchFamily="34" charset="-122"/>
                 <a:cs typeface="Calibri" pitchFamily="34" charset="-120"/>
               </a:rPr>
-              <a:t>Revolutionize Your Innovation Process for Materials Companies</a:t>
+              <a:t>Revolutionize Your Innovation Process – </a:t>
+            </a:r>
+            <a:r>
+              <a:rPr lang="en-US" altLang="zh-CN" sz="1200" dirty="0">
+                <a:solidFill>
+                  <a:srgbClr val="7E8D9E"/>
+                </a:solidFill>
+                <a:latin typeface="Calibri" pitchFamily="34" charset="0"/>
+                <a:ea typeface="Calibri" pitchFamily="34" charset="-122"/>
+                <a:cs typeface="Calibri" pitchFamily="34" charset="-120"/>
+              </a:rPr>
+              <a:t>The AI-Native R&amp;D Platform</a:t>
             </a:r>
             <a:endParaRPr lang="en-US" sz="1300" dirty="0"/>
           </a:p>
@@ -1620,7 +1628,7 @@
         </p:nvSpPr>
         <p:spPr>
           <a:xfrm>
-            <a:off x="731520" y="2322835"/>
+            <a:off x="731520" y="2578867"/>
             <a:ext cx="7315200" cy="201168"/>
           </a:xfrm>
           <a:prstGeom prst="rect">
@@ -1659,7 +1667,7 @@
         </p:nvSpPr>
         <p:spPr>
           <a:xfrm>
-            <a:off x="777240" y="2642875"/>
+            <a:off x="777240" y="2898907"/>
             <a:ext cx="54864" cy="54864"/>
           </a:xfrm>
           <a:prstGeom prst="rect">
@@ -1686,7 +1694,7 @@
         </p:nvSpPr>
         <p:spPr>
           <a:xfrm>
-            <a:off x="960120" y="2588011"/>
+            <a:off x="960120" y="2844043"/>
             <a:ext cx="7315200" cy="182880"/>
           </a:xfrm>
           <a:prstGeom prst="rect">
@@ -1725,7 +1733,7 @@
         </p:nvSpPr>
         <p:spPr>
           <a:xfrm>
-            <a:off x="777240" y="2844043"/>
+            <a:off x="777240" y="3100075"/>
             <a:ext cx="54864" cy="54864"/>
           </a:xfrm>
           <a:prstGeom prst="rect">
@@ -1752,7 +1760,7 @@
         </p:nvSpPr>
         <p:spPr>
           <a:xfrm>
-            <a:off x="960120" y="2789179"/>
+            <a:off x="960120" y="3045211"/>
             <a:ext cx="7315200" cy="182880"/>
           </a:xfrm>
           <a:prstGeom prst="rect">
@@ -1791,7 +1799,7 @@
         </p:nvSpPr>
         <p:spPr>
           <a:xfrm>
-            <a:off x="777240" y="3045211"/>
+            <a:off x="777240" y="3301243"/>
             <a:ext cx="54864" cy="54864"/>
           </a:xfrm>
           <a:prstGeom prst="rect">
@@ -1818,7 +1826,7 @@
         </p:nvSpPr>
         <p:spPr>
           <a:xfrm>
-            <a:off x="960120" y="2990347"/>
+            <a:off x="960120" y="3246379"/>
             <a:ext cx="7315200" cy="182880"/>
           </a:xfrm>
           <a:prstGeom prst="rect">
@@ -1857,7 +1865,7 @@
         </p:nvSpPr>
         <p:spPr>
           <a:xfrm>
-            <a:off x="777240" y="3246379"/>
+            <a:off x="777240" y="3502411"/>
             <a:ext cx="54864" cy="54864"/>
           </a:xfrm>
           <a:prstGeom prst="rect">
@@ -1884,7 +1892,7 @@
         </p:nvSpPr>
         <p:spPr>
           <a:xfrm>
-            <a:off x="960120" y="3191515"/>
+            <a:off x="960120" y="3447547"/>
             <a:ext cx="7315200" cy="182880"/>
           </a:xfrm>
           <a:prstGeom prst="rect">
@@ -1923,7 +1931,7 @@
         </p:nvSpPr>
         <p:spPr>
           <a:xfrm>
-            <a:off x="777240" y="3447547"/>
+            <a:off x="777240" y="3703579"/>
             <a:ext cx="54864" cy="54864"/>
           </a:xfrm>
           <a:prstGeom prst="rect">
@@ -1950,7 +1958,7 @@
         </p:nvSpPr>
         <p:spPr>
           <a:xfrm>
-            <a:off x="960120" y="3392683"/>
+            <a:off x="960120" y="3648715"/>
             <a:ext cx="7315200" cy="182880"/>
           </a:xfrm>
           <a:prstGeom prst="rect">
@@ -1989,7 +1997,7 @@
         </p:nvSpPr>
         <p:spPr>
           <a:xfrm>
-            <a:off x="777240" y="3648715"/>
+            <a:off x="777240" y="3904747"/>
             <a:ext cx="54864" cy="54864"/>
           </a:xfrm>
           <a:prstGeom prst="rect">
@@ -2016,7 +2024,7 @@
         </p:nvSpPr>
         <p:spPr>
           <a:xfrm>
-            <a:off x="960120" y="3593851"/>
+            <a:off x="960120" y="3849883"/>
             <a:ext cx="7315200" cy="182880"/>
           </a:xfrm>
           <a:prstGeom prst="rect">
@@ -2055,7 +2063,7 @@
         </p:nvSpPr>
         <p:spPr>
           <a:xfrm>
-            <a:off x="777240" y="3849883"/>
+            <a:off x="777240" y="4105915"/>
             <a:ext cx="54864" cy="54864"/>
           </a:xfrm>
           <a:prstGeom prst="rect">
@@ -2082,7 +2090,7 @@
         </p:nvSpPr>
         <p:spPr>
           <a:xfrm>
-            <a:off x="960120" y="3795019"/>
+            <a:off x="960120" y="4051051"/>
             <a:ext cx="7315200" cy="182880"/>
           </a:xfrm>
           <a:prstGeom prst="rect">
@@ -2933,45 +2941,6 @@
       </p:sp>
       <p:sp>
         <p:nvSpPr>
-          <p:cNvPr id="22" name="Text 20"/>
-          <p:cNvSpPr/>
-          <p:nvPr/>
-        </p:nvSpPr>
-        <p:spPr>
-          <a:xfrm>
-            <a:off x="731520" y="4480560"/>
-            <a:ext cx="7315200" cy="146304"/>
-          </a:xfrm>
-          <a:prstGeom prst="rect">
-            <a:avLst/>
-          </a:prstGeom>
-          <a:noFill/>
-          <a:ln/>
-        </p:spPr>
-        <p:txBody>
-          <a:bodyPr wrap="square" lIns="0" tIns="0" rIns="0" bIns="0" rtlCol="0" anchor="ctr"/>
-          <a:lstStyle/>
-          <a:p>
-            <a:pPr marL="0" indent="0">
-              <a:buNone/>
-            </a:pPr>
-            <a:r>
-              <a:rPr lang="en-US" sz="800" dirty="0">
-                <a:solidFill>
-                  <a:srgbClr val="00BFA5"/>
-                </a:solidFill>
-                <a:latin typeface="Consolas" pitchFamily="34" charset="0"/>
-                <a:ea typeface="Consolas" pitchFamily="34" charset="-122"/>
-                <a:cs typeface="Consolas" pitchFamily="34" charset="-120"/>
-              </a:rPr>
-              <a:t>github.com/newbison/AI_CHEMIST  ·  github.com/newbison/spc-batch-monitor</a:t>
-            </a:r>
-            <a:endParaRPr lang="en-US" sz="800" dirty="0"/>
-          </a:p>
-        </p:txBody>
-      </p:sp>
-      <p:sp>
-        <p:nvSpPr>
           <p:cNvPr id="23" name="Text 21"/>
           <p:cNvSpPr/>
           <p:nvPr/>
@@ -6960,7 +6929,7 @@
               <a:buNone/>
             </a:pPr>
             <a:r>
-              <a:rPr lang="en-US" sz="2700" b="1" dirty="0">
+              <a:rPr lang="en-US" sz="2400" b="1" dirty="0">
                 <a:solidFill>
                   <a:srgbClr val="EBE8E3"/>
                 </a:solidFill>
@@ -6970,7 +6939,7 @@
               </a:rPr>
               <a:t>AI Maps Competitors + Identifies White Space</a:t>
             </a:r>
-            <a:endParaRPr lang="en-US" sz="2700" dirty="0"/>
+            <a:endParaRPr lang="en-US" sz="2400" dirty="0"/>
           </a:p>
         </p:txBody>
       </p:sp>
@@ -12399,7 +12368,7 @@
               <a:buNone/>
             </a:pPr>
             <a:r>
-              <a:rPr lang="en-US" sz="2700" b="1" dirty="0">
+              <a:rPr lang="en-US" sz="2400" b="1" dirty="0">
                 <a:solidFill>
                   <a:srgbClr val="EBE8E3"/>
                 </a:solidFill>
@@ -12409,7 +12378,7 @@
               </a:rPr>
               <a:t>FORGE AI ↔ SPC Platform · Closed-Loop R&amp;D</a:t>
             </a:r>
-            <a:endParaRPr lang="en-US" sz="2700" dirty="0"/>
+            <a:endParaRPr lang="en-US" sz="2400" dirty="0"/>
           </a:p>
         </p:txBody>
       </p:sp>
